--- a/Introduction_Neural_nets_Oscar_20April2026.pptx
+++ b/Introduction_Neural_nets_Oscar_20April2026.pptx
@@ -275,7 +275,7 @@
           <a:p>
             <a:fld id="{5E219564-AE19-A54C-9048-0B9ABC52A624}" type="datetimeFigureOut">
               <a:rPr lang="de-DE" smtClean="0"/>
-              <a:t>20.04.26</a:t>
+              <a:t>21.04.26</a:t>
             </a:fld>
             <a:endParaRPr lang="de-DE"/>
           </a:p>
@@ -409,14 +409,14 @@
           <a:effectLst/>
           <a:extLst>
             <a:ext uri="{909E8E84-426E-40dd-AFC4-6F175D3DCCD1}">
-              <a14:hiddenFill xmlns:a14="http://schemas.microsoft.com/office/drawing/2010/main" xmlns="">
+              <a14:hiddenFill xmlns="" xmlns:a14="http://schemas.microsoft.com/office/drawing/2010/main">
                 <a:solidFill>
                   <a:schemeClr val="accent1"/>
                 </a:solidFill>
               </a14:hiddenFill>
             </a:ext>
             <a:ext uri="{91240B29-F687-4f45-9708-019B960494DF}">
-              <a14:hiddenLine xmlns:a14="http://schemas.microsoft.com/office/drawing/2010/main" xmlns="" w="9525">
+              <a14:hiddenLine xmlns="" xmlns:a14="http://schemas.microsoft.com/office/drawing/2010/main" w="9525">
                 <a:solidFill>
                   <a:schemeClr val="tx1"/>
                 </a:solidFill>
@@ -426,7 +426,7 @@
               </a14:hiddenLine>
             </a:ext>
             <a:ext uri="{AF507438-7753-43e0-B8FC-AC1667EBCBE1}">
-              <a14:hiddenEffects xmlns:a14="http://schemas.microsoft.com/office/drawing/2010/main" xmlns="">
+              <a14:hiddenEffects xmlns="" xmlns:a14="http://schemas.microsoft.com/office/drawing/2010/main">
                 <a:effectLst>
                   <a:outerShdw blurRad="63500" dist="38099" dir="2700000" algn="ctr" rotWithShape="0">
                     <a:schemeClr val="bg2">
@@ -437,7 +437,7 @@
               </a14:hiddenEffects>
             </a:ext>
             <a:ext uri="{FAA26D3D-D897-4be2-8F04-BA451C77F1D7}">
-              <ma14:placeholderFlag xmlns:ma14="http://schemas.microsoft.com/office/mac/drawingml/2011/main" xmlns="" val="1"/>
+              <ma14:placeholderFlag xmlns="" xmlns:ma14="http://schemas.microsoft.com/office/mac/drawingml/2011/main" val="1"/>
             </a:ext>
           </a:extLst>
         </p:spPr>
@@ -488,14 +488,14 @@
           <a:effectLst/>
           <a:extLst>
             <a:ext uri="{909E8E84-426E-40dd-AFC4-6F175D3DCCD1}">
-              <a14:hiddenFill xmlns:a14="http://schemas.microsoft.com/office/drawing/2010/main" xmlns="">
+              <a14:hiddenFill xmlns="" xmlns:a14="http://schemas.microsoft.com/office/drawing/2010/main">
                 <a:solidFill>
                   <a:schemeClr val="accent1"/>
                 </a:solidFill>
               </a14:hiddenFill>
             </a:ext>
             <a:ext uri="{91240B29-F687-4f45-9708-019B960494DF}">
-              <a14:hiddenLine xmlns:a14="http://schemas.microsoft.com/office/drawing/2010/main" xmlns="" w="9525">
+              <a14:hiddenLine xmlns="" xmlns:a14="http://schemas.microsoft.com/office/drawing/2010/main" w="9525">
                 <a:solidFill>
                   <a:schemeClr val="tx1"/>
                 </a:solidFill>
@@ -505,7 +505,7 @@
               </a14:hiddenLine>
             </a:ext>
             <a:ext uri="{AF507438-7753-43e0-B8FC-AC1667EBCBE1}">
-              <a14:hiddenEffects xmlns:a14="http://schemas.microsoft.com/office/drawing/2010/main" xmlns="">
+              <a14:hiddenEffects xmlns="" xmlns:a14="http://schemas.microsoft.com/office/drawing/2010/main">
                 <a:effectLst>
                   <a:outerShdw blurRad="63500" dist="38099" dir="2700000" algn="ctr" rotWithShape="0">
                     <a:schemeClr val="bg2">
@@ -516,7 +516,7 @@
               </a14:hiddenEffects>
             </a:ext>
             <a:ext uri="{FAA26D3D-D897-4be2-8F04-BA451C77F1D7}">
-              <ma14:placeholderFlag xmlns:ma14="http://schemas.microsoft.com/office/mac/drawingml/2011/main" xmlns="" val="1"/>
+              <ma14:placeholderFlag xmlns="" xmlns:ma14="http://schemas.microsoft.com/office/mac/drawingml/2011/main" val="1"/>
             </a:ext>
           </a:extLst>
         </p:spPr>
@@ -572,7 +572,7 @@
           <a:effectLst/>
           <a:extLst>
             <a:ext uri="{AF507438-7753-43e0-B8FC-AC1667EBCBE1}">
-              <a14:hiddenEffects xmlns:a14="http://schemas.microsoft.com/office/drawing/2010/main" xmlns="">
+              <a14:hiddenEffects xmlns="" xmlns:a14="http://schemas.microsoft.com/office/drawing/2010/main">
                 <a:effectLst>
                   <a:outerShdw blurRad="63500" dist="38099" dir="2700000" algn="ctr" rotWithShape="0">
                     <a:srgbClr val="000000">
@@ -583,7 +583,7 @@
               </a14:hiddenEffects>
             </a:ext>
             <a:ext uri="{53640926-AAD7-44d8-BBD7-CCE9431645EC}">
-              <a14:shadowObscured xmlns:a14="http://schemas.microsoft.com/office/drawing/2010/main" xmlns="" val="1"/>
+              <a14:shadowObscured xmlns="" xmlns:a14="http://schemas.microsoft.com/office/drawing/2010/main" val="1"/>
             </a:ext>
           </a:extLst>
         </p:spPr>
@@ -613,14 +613,14 @@
           <a:effectLst/>
           <a:extLst>
             <a:ext uri="{909E8E84-426E-40dd-AFC4-6F175D3DCCD1}">
-              <a14:hiddenFill xmlns:a14="http://schemas.microsoft.com/office/drawing/2010/main" xmlns="">
+              <a14:hiddenFill xmlns="" xmlns:a14="http://schemas.microsoft.com/office/drawing/2010/main">
                 <a:solidFill>
                   <a:schemeClr val="accent1"/>
                 </a:solidFill>
               </a14:hiddenFill>
             </a:ext>
             <a:ext uri="{91240B29-F687-4f45-9708-019B960494DF}">
-              <a14:hiddenLine xmlns:a14="http://schemas.microsoft.com/office/drawing/2010/main" xmlns="" w="9525">
+              <a14:hiddenLine xmlns="" xmlns:a14="http://schemas.microsoft.com/office/drawing/2010/main" w="9525">
                 <a:solidFill>
                   <a:schemeClr val="tx1"/>
                 </a:solidFill>
@@ -630,7 +630,7 @@
               </a14:hiddenLine>
             </a:ext>
             <a:ext uri="{AF507438-7753-43e0-B8FC-AC1667EBCBE1}">
-              <a14:hiddenEffects xmlns:a14="http://schemas.microsoft.com/office/drawing/2010/main" xmlns="">
+              <a14:hiddenEffects xmlns="" xmlns:a14="http://schemas.microsoft.com/office/drawing/2010/main">
                 <a:effectLst>
                   <a:outerShdw blurRad="63500" dist="38099" dir="2700000" algn="ctr" rotWithShape="0">
                     <a:schemeClr val="bg2">
@@ -641,7 +641,7 @@
               </a14:hiddenEffects>
             </a:ext>
             <a:ext uri="{FAA26D3D-D897-4be2-8F04-BA451C77F1D7}">
-              <ma14:placeholderFlag xmlns:ma14="http://schemas.microsoft.com/office/mac/drawingml/2011/main" xmlns="" val="1"/>
+              <ma14:placeholderFlag xmlns="" xmlns:ma14="http://schemas.microsoft.com/office/mac/drawingml/2011/main" val="1"/>
             </a:ext>
           </a:extLst>
         </p:spPr>
@@ -714,14 +714,14 @@
           <a:effectLst/>
           <a:extLst>
             <a:ext uri="{909E8E84-426E-40dd-AFC4-6F175D3DCCD1}">
-              <a14:hiddenFill xmlns:a14="http://schemas.microsoft.com/office/drawing/2010/main" xmlns="">
+              <a14:hiddenFill xmlns="" xmlns:a14="http://schemas.microsoft.com/office/drawing/2010/main">
                 <a:solidFill>
                   <a:schemeClr val="accent1"/>
                 </a:solidFill>
               </a14:hiddenFill>
             </a:ext>
             <a:ext uri="{91240B29-F687-4f45-9708-019B960494DF}">
-              <a14:hiddenLine xmlns:a14="http://schemas.microsoft.com/office/drawing/2010/main" xmlns="" w="9525">
+              <a14:hiddenLine xmlns="" xmlns:a14="http://schemas.microsoft.com/office/drawing/2010/main" w="9525">
                 <a:solidFill>
                   <a:schemeClr val="tx1"/>
                 </a:solidFill>
@@ -731,7 +731,7 @@
               </a14:hiddenLine>
             </a:ext>
             <a:ext uri="{AF507438-7753-43e0-B8FC-AC1667EBCBE1}">
-              <a14:hiddenEffects xmlns:a14="http://schemas.microsoft.com/office/drawing/2010/main" xmlns="">
+              <a14:hiddenEffects xmlns="" xmlns:a14="http://schemas.microsoft.com/office/drawing/2010/main">
                 <a:effectLst>
                   <a:outerShdw blurRad="63500" dist="38099" dir="2700000" algn="ctr" rotWithShape="0">
                     <a:schemeClr val="bg2">
@@ -742,7 +742,7 @@
               </a14:hiddenEffects>
             </a:ext>
             <a:ext uri="{FAA26D3D-D897-4be2-8F04-BA451C77F1D7}">
-              <ma14:placeholderFlag xmlns:ma14="http://schemas.microsoft.com/office/mac/drawingml/2011/main" xmlns="" val="1"/>
+              <ma14:placeholderFlag xmlns="" xmlns:ma14="http://schemas.microsoft.com/office/mac/drawingml/2011/main" val="1"/>
             </a:ext>
           </a:extLst>
         </p:spPr>
@@ -793,14 +793,14 @@
           <a:effectLst/>
           <a:extLst>
             <a:ext uri="{909E8E84-426E-40dd-AFC4-6F175D3DCCD1}">
-              <a14:hiddenFill xmlns:a14="http://schemas.microsoft.com/office/drawing/2010/main" xmlns="">
+              <a14:hiddenFill xmlns="" xmlns:a14="http://schemas.microsoft.com/office/drawing/2010/main">
                 <a:solidFill>
                   <a:schemeClr val="accent1"/>
                 </a:solidFill>
               </a14:hiddenFill>
             </a:ext>
             <a:ext uri="{91240B29-F687-4f45-9708-019B960494DF}">
-              <a14:hiddenLine xmlns:a14="http://schemas.microsoft.com/office/drawing/2010/main" xmlns="" w="9525">
+              <a14:hiddenLine xmlns="" xmlns:a14="http://schemas.microsoft.com/office/drawing/2010/main" w="9525">
                 <a:solidFill>
                   <a:schemeClr val="tx1"/>
                 </a:solidFill>
@@ -810,7 +810,7 @@
               </a14:hiddenLine>
             </a:ext>
             <a:ext uri="{AF507438-7753-43e0-B8FC-AC1667EBCBE1}">
-              <a14:hiddenEffects xmlns:a14="http://schemas.microsoft.com/office/drawing/2010/main" xmlns="">
+              <a14:hiddenEffects xmlns="" xmlns:a14="http://schemas.microsoft.com/office/drawing/2010/main">
                 <a:effectLst>
                   <a:outerShdw blurRad="63500" dist="38099" dir="2700000" algn="ctr" rotWithShape="0">
                     <a:schemeClr val="bg2">
@@ -821,7 +821,7 @@
               </a14:hiddenEffects>
             </a:ext>
             <a:ext uri="{FAA26D3D-D897-4be2-8F04-BA451C77F1D7}">
-              <ma14:placeholderFlag xmlns:ma14="http://schemas.microsoft.com/office/mac/drawingml/2011/main" xmlns="" val="1"/>
+              <ma14:placeholderFlag xmlns="" xmlns:ma14="http://schemas.microsoft.com/office/mac/drawingml/2011/main" val="1"/>
             </a:ext>
           </a:extLst>
         </p:spPr>
@@ -2134,7 +2134,7 @@
           <a:effectLst/>
           <a:extLst>
             <a:ext uri="{91240B29-F687-4f45-9708-019B960494DF}">
-              <a14:hiddenLine xmlns:a14="http://schemas.microsoft.com/office/drawing/2010/main" xmlns="" w="9525">
+              <a14:hiddenLine xmlns="" xmlns:a14="http://schemas.microsoft.com/office/drawing/2010/main" w="9525">
                 <a:solidFill>
                   <a:schemeClr val="tx1"/>
                 </a:solidFill>
@@ -2144,7 +2144,7 @@
               </a14:hiddenLine>
             </a:ext>
             <a:ext uri="{AF507438-7753-43e0-B8FC-AC1667EBCBE1}">
-              <a14:hiddenEffects xmlns:a14="http://schemas.microsoft.com/office/drawing/2010/main" xmlns="">
+              <a14:hiddenEffects xmlns="" xmlns:a14="http://schemas.microsoft.com/office/drawing/2010/main">
                 <a:effectLst>
                   <a:outerShdw blurRad="63500" dist="38099" dir="2700000" algn="ctr" rotWithShape="0">
                     <a:schemeClr val="bg2">
@@ -2197,12 +2197,12 @@
           <a:effectLst/>
           <a:extLst>
             <a:ext uri="{909E8E84-426E-40dd-AFC4-6F175D3DCCD1}">
-              <a14:hiddenFill xmlns:a14="http://schemas.microsoft.com/office/drawing/2010/main" xmlns="">
+              <a14:hiddenFill xmlns="" xmlns:a14="http://schemas.microsoft.com/office/drawing/2010/main">
                 <a:noFill/>
               </a14:hiddenFill>
             </a:ext>
             <a:ext uri="{AF507438-7753-43e0-B8FC-AC1667EBCBE1}">
-              <a14:hiddenEffects xmlns:a14="http://schemas.microsoft.com/office/drawing/2010/main" xmlns="">
+              <a14:hiddenEffects xmlns="" xmlns:a14="http://schemas.microsoft.com/office/drawing/2010/main">
                 <a:effectLst>
                   <a:outerShdw blurRad="63500" dist="38099" dir="2700000" algn="ctr" rotWithShape="0">
                     <a:schemeClr val="bg2">
@@ -2255,12 +2255,12 @@
           <a:effectLst/>
           <a:extLst>
             <a:ext uri="{909E8E84-426E-40dd-AFC4-6F175D3DCCD1}">
-              <a14:hiddenFill xmlns:a14="http://schemas.microsoft.com/office/drawing/2010/main" xmlns="">
+              <a14:hiddenFill xmlns="" xmlns:a14="http://schemas.microsoft.com/office/drawing/2010/main">
                 <a:noFill/>
               </a14:hiddenFill>
             </a:ext>
             <a:ext uri="{AF507438-7753-43e0-B8FC-AC1667EBCBE1}">
-              <a14:hiddenEffects xmlns:a14="http://schemas.microsoft.com/office/drawing/2010/main" xmlns="">
+              <a14:hiddenEffects xmlns="" xmlns:a14="http://schemas.microsoft.com/office/drawing/2010/main">
                 <a:effectLst>
                   <a:outerShdw blurRad="63500" dist="38099" dir="2700000" algn="ctr" rotWithShape="0">
                     <a:schemeClr val="bg2">
@@ -2319,14 +2319,14 @@
           </a:ln>
           <a:extLst>
             <a:ext uri="{909E8E84-426E-40dd-AFC4-6F175D3DCCD1}">
-              <a14:hiddenFill xmlns:a14="http://schemas.microsoft.com/office/drawing/2010/main" xmlns="">
+              <a14:hiddenFill xmlns="" xmlns:a14="http://schemas.microsoft.com/office/drawing/2010/main">
                 <a:solidFill>
                   <a:srgbClr val="FFFFFF"/>
                 </a:solidFill>
               </a14:hiddenFill>
             </a:ext>
             <a:ext uri="{91240B29-F687-4f45-9708-019B960494DF}">
-              <a14:hiddenLine xmlns:a14="http://schemas.microsoft.com/office/drawing/2010/main" xmlns="" w="9525">
+              <a14:hiddenLine xmlns="" xmlns:a14="http://schemas.microsoft.com/office/drawing/2010/main" w="9525">
                 <a:solidFill>
                   <a:srgbClr val="000000"/>
                 </a:solidFill>
@@ -2520,14 +2520,14 @@
           </a:ln>
           <a:extLst>
             <a:ext uri="{909E8E84-426E-40dd-AFC4-6F175D3DCCD1}">
-              <a14:hiddenFill xmlns:a14="http://schemas.microsoft.com/office/drawing/2010/main" xmlns="">
+              <a14:hiddenFill xmlns="" xmlns:a14="http://schemas.microsoft.com/office/drawing/2010/main">
                 <a:solidFill>
                   <a:srgbClr val="FFFFFF"/>
                 </a:solidFill>
               </a14:hiddenFill>
             </a:ext>
             <a:ext uri="{91240B29-F687-4f45-9708-019B960494DF}">
-              <a14:hiddenLine xmlns:a14="http://schemas.microsoft.com/office/drawing/2010/main" xmlns="" w="9525">
+              <a14:hiddenLine xmlns="" xmlns:a14="http://schemas.microsoft.com/office/drawing/2010/main" w="9525">
                 <a:solidFill>
                   <a:srgbClr val="000000"/>
                 </a:solidFill>
@@ -2563,7 +2563,7 @@
           </a:ln>
           <a:extLst>
             <a:ext uri="{91240B29-F687-4f45-9708-019B960494DF}">
-              <a14:hiddenLine xmlns:a14="http://schemas.microsoft.com/office/drawing/2010/main" xmlns="" w="9525">
+              <a14:hiddenLine xmlns="" xmlns:a14="http://schemas.microsoft.com/office/drawing/2010/main" w="9525">
                 <a:solidFill>
                   <a:srgbClr val="000000"/>
                 </a:solidFill>
@@ -2611,12 +2611,12 @@
           <a:effectLst/>
           <a:extLst>
             <a:ext uri="{909E8E84-426E-40dd-AFC4-6F175D3DCCD1}">
-              <a14:hiddenFill xmlns:a14="http://schemas.microsoft.com/office/drawing/2010/main" xmlns="">
+              <a14:hiddenFill xmlns="" xmlns:a14="http://schemas.microsoft.com/office/drawing/2010/main">
                 <a:noFill/>
               </a14:hiddenFill>
             </a:ext>
             <a:ext uri="{AF507438-7753-43e0-B8FC-AC1667EBCBE1}">
-              <a14:hiddenEffects xmlns:a14="http://schemas.microsoft.com/office/drawing/2010/main" xmlns="">
+              <a14:hiddenEffects xmlns="" xmlns:a14="http://schemas.microsoft.com/office/drawing/2010/main">
                 <a:effectLst>
                   <a:outerShdw blurRad="63500" dist="38099" dir="2700000" algn="ctr" rotWithShape="0">
                     <a:schemeClr val="bg2">
@@ -2669,12 +2669,12 @@
           <a:effectLst/>
           <a:extLst>
             <a:ext uri="{909E8E84-426E-40dd-AFC4-6F175D3DCCD1}">
-              <a14:hiddenFill xmlns:a14="http://schemas.microsoft.com/office/drawing/2010/main" xmlns="">
+              <a14:hiddenFill xmlns="" xmlns:a14="http://schemas.microsoft.com/office/drawing/2010/main">
                 <a:noFill/>
               </a14:hiddenFill>
             </a:ext>
             <a:ext uri="{AF507438-7753-43e0-B8FC-AC1667EBCBE1}">
-              <a14:hiddenEffects xmlns:a14="http://schemas.microsoft.com/office/drawing/2010/main" xmlns="">
+              <a14:hiddenEffects xmlns="" xmlns:a14="http://schemas.microsoft.com/office/drawing/2010/main">
                 <a:effectLst>
                   <a:outerShdw blurRad="63500" dist="38099" dir="2700000" algn="ctr" rotWithShape="0">
                     <a:schemeClr val="bg2">
@@ -2727,12 +2727,12 @@
           <a:effectLst/>
           <a:extLst>
             <a:ext uri="{909E8E84-426E-40dd-AFC4-6F175D3DCCD1}">
-              <a14:hiddenFill xmlns:a14="http://schemas.microsoft.com/office/drawing/2010/main" xmlns="">
+              <a14:hiddenFill xmlns="" xmlns:a14="http://schemas.microsoft.com/office/drawing/2010/main">
                 <a:noFill/>
               </a14:hiddenFill>
             </a:ext>
             <a:ext uri="{AF507438-7753-43e0-B8FC-AC1667EBCBE1}">
-              <a14:hiddenEffects xmlns:a14="http://schemas.microsoft.com/office/drawing/2010/main" xmlns="">
+              <a14:hiddenEffects xmlns="" xmlns:a14="http://schemas.microsoft.com/office/drawing/2010/main">
                 <a:effectLst>
                   <a:outerShdw blurRad="63500" dist="38099" dir="2700000" algn="ctr" rotWithShape="0">
                     <a:schemeClr val="bg2">
@@ -2791,14 +2791,14 @@
           </a:ln>
           <a:extLst>
             <a:ext uri="{909E8E84-426E-40dd-AFC4-6F175D3DCCD1}">
-              <a14:hiddenFill xmlns:a14="http://schemas.microsoft.com/office/drawing/2010/main" xmlns="">
+              <a14:hiddenFill xmlns="" xmlns:a14="http://schemas.microsoft.com/office/drawing/2010/main">
                 <a:solidFill>
                   <a:srgbClr val="FFFFFF"/>
                 </a:solidFill>
               </a14:hiddenFill>
             </a:ext>
             <a:ext uri="{91240B29-F687-4f45-9708-019B960494DF}">
-              <a14:hiddenLine xmlns:a14="http://schemas.microsoft.com/office/drawing/2010/main" xmlns="" w="9525">
+              <a14:hiddenLine xmlns="" xmlns:a14="http://schemas.microsoft.com/office/drawing/2010/main" w="9525">
                 <a:solidFill>
                   <a:srgbClr val="000000"/>
                 </a:solidFill>
@@ -2881,14 +2881,14 @@
           </a:ln>
           <a:extLst>
             <a:ext uri="{909E8E84-426E-40dd-AFC4-6F175D3DCCD1}">
-              <a14:hiddenFill xmlns:a14="http://schemas.microsoft.com/office/drawing/2010/main" xmlns="">
+              <a14:hiddenFill xmlns="" xmlns:a14="http://schemas.microsoft.com/office/drawing/2010/main">
                 <a:solidFill>
                   <a:srgbClr val="FFFFFF"/>
                 </a:solidFill>
               </a14:hiddenFill>
             </a:ext>
             <a:ext uri="{91240B29-F687-4f45-9708-019B960494DF}">
-              <a14:hiddenLine xmlns:a14="http://schemas.microsoft.com/office/drawing/2010/main" xmlns="" w="9525">
+              <a14:hiddenLine xmlns="" xmlns:a14="http://schemas.microsoft.com/office/drawing/2010/main" w="9525">
                 <a:solidFill>
                   <a:srgbClr val="000000"/>
                 </a:solidFill>
@@ -2924,7 +2924,7 @@
           </a:ln>
           <a:extLst>
             <a:ext uri="{91240B29-F687-4f45-9708-019B960494DF}">
-              <a14:hiddenLine xmlns:a14="http://schemas.microsoft.com/office/drawing/2010/main" xmlns="" w="9525">
+              <a14:hiddenLine xmlns="" xmlns:a14="http://schemas.microsoft.com/office/drawing/2010/main" w="9525">
                 <a:solidFill>
                   <a:srgbClr val="000000"/>
                 </a:solidFill>
@@ -2972,12 +2972,12 @@
           <a:effectLst/>
           <a:extLst>
             <a:ext uri="{909E8E84-426E-40dd-AFC4-6F175D3DCCD1}">
-              <a14:hiddenFill xmlns:a14="http://schemas.microsoft.com/office/drawing/2010/main" xmlns="">
+              <a14:hiddenFill xmlns="" xmlns:a14="http://schemas.microsoft.com/office/drawing/2010/main">
                 <a:noFill/>
               </a14:hiddenFill>
             </a:ext>
             <a:ext uri="{AF507438-7753-43e0-B8FC-AC1667EBCBE1}">
-              <a14:hiddenEffects xmlns:a14="http://schemas.microsoft.com/office/drawing/2010/main" xmlns="">
+              <a14:hiddenEffects xmlns="" xmlns:a14="http://schemas.microsoft.com/office/drawing/2010/main">
                 <a:effectLst>
                   <a:outerShdw blurRad="63500" dist="38099" dir="2700000" algn="ctr" rotWithShape="0">
                     <a:schemeClr val="bg2">
@@ -3030,12 +3030,12 @@
           <a:effectLst/>
           <a:extLst>
             <a:ext uri="{909E8E84-426E-40dd-AFC4-6F175D3DCCD1}">
-              <a14:hiddenFill xmlns:a14="http://schemas.microsoft.com/office/drawing/2010/main" xmlns="">
+              <a14:hiddenFill xmlns="" xmlns:a14="http://schemas.microsoft.com/office/drawing/2010/main">
                 <a:noFill/>
               </a14:hiddenFill>
             </a:ext>
             <a:ext uri="{AF507438-7753-43e0-B8FC-AC1667EBCBE1}">
-              <a14:hiddenEffects xmlns:a14="http://schemas.microsoft.com/office/drawing/2010/main" xmlns="">
+              <a14:hiddenEffects xmlns="" xmlns:a14="http://schemas.microsoft.com/office/drawing/2010/main">
                 <a:effectLst>
                   <a:outerShdw blurRad="63500" dist="38099" dir="2700000" algn="ctr" rotWithShape="0">
                     <a:schemeClr val="bg2">
@@ -3094,14 +3094,14 @@
           </a:ln>
           <a:extLst>
             <a:ext uri="{909E8E84-426E-40dd-AFC4-6F175D3DCCD1}">
-              <a14:hiddenFill xmlns:a14="http://schemas.microsoft.com/office/drawing/2010/main" xmlns="">
+              <a14:hiddenFill xmlns="" xmlns:a14="http://schemas.microsoft.com/office/drawing/2010/main">
                 <a:solidFill>
                   <a:srgbClr val="FFFFFF"/>
                 </a:solidFill>
               </a14:hiddenFill>
             </a:ext>
             <a:ext uri="{91240B29-F687-4f45-9708-019B960494DF}">
-              <a14:hiddenLine xmlns:a14="http://schemas.microsoft.com/office/drawing/2010/main" xmlns="" w="9525">
+              <a14:hiddenLine xmlns="" xmlns:a14="http://schemas.microsoft.com/office/drawing/2010/main" w="9525">
                 <a:solidFill>
                   <a:srgbClr val="000000"/>
                 </a:solidFill>
@@ -3168,7 +3168,7 @@
           <a:effectLst/>
           <a:extLst>
             <a:ext uri="{91240B29-F687-4f45-9708-019B960494DF}">
-              <a14:hiddenLine xmlns:a14="http://schemas.microsoft.com/office/drawing/2010/main" xmlns="" w="9525">
+              <a14:hiddenLine xmlns="" xmlns:a14="http://schemas.microsoft.com/office/drawing/2010/main" w="9525">
                 <a:solidFill>
                   <a:schemeClr val="tx1"/>
                 </a:solidFill>
@@ -3178,7 +3178,7 @@
               </a14:hiddenLine>
             </a:ext>
             <a:ext uri="{AF507438-7753-43e0-B8FC-AC1667EBCBE1}">
-              <a14:hiddenEffects xmlns:a14="http://schemas.microsoft.com/office/drawing/2010/main" xmlns="">
+              <a14:hiddenEffects xmlns="" xmlns:a14="http://schemas.microsoft.com/office/drawing/2010/main">
                 <a:effectLst>
                   <a:outerShdw blurRad="63500" dist="38099" dir="2700000" algn="ctr" rotWithShape="0">
                     <a:schemeClr val="bg2">
@@ -3228,7 +3228,7 @@
           <a:effectLst/>
           <a:extLst>
             <a:ext uri="{91240B29-F687-4f45-9708-019B960494DF}">
-              <a14:hiddenLine xmlns:a14="http://schemas.microsoft.com/office/drawing/2010/main" xmlns="" w="9525">
+              <a14:hiddenLine xmlns="" xmlns:a14="http://schemas.microsoft.com/office/drawing/2010/main" w="9525">
                 <a:solidFill>
                   <a:schemeClr val="tx1"/>
                 </a:solidFill>
@@ -3238,7 +3238,7 @@
               </a14:hiddenLine>
             </a:ext>
             <a:ext uri="{AF507438-7753-43e0-B8FC-AC1667EBCBE1}">
-              <a14:hiddenEffects xmlns:a14="http://schemas.microsoft.com/office/drawing/2010/main" xmlns="">
+              <a14:hiddenEffects xmlns="" xmlns:a14="http://schemas.microsoft.com/office/drawing/2010/main">
                 <a:effectLst>
                   <a:outerShdw blurRad="63500" dist="38099" dir="2700000" algn="ctr" rotWithShape="0">
                     <a:schemeClr val="bg2">
@@ -3299,14 +3299,14 @@
           </a:ln>
           <a:extLst>
             <a:ext uri="{909E8E84-426E-40dd-AFC4-6F175D3DCCD1}">
-              <a14:hiddenFill xmlns:a14="http://schemas.microsoft.com/office/drawing/2010/main" xmlns="">
+              <a14:hiddenFill xmlns="" xmlns:a14="http://schemas.microsoft.com/office/drawing/2010/main">
                 <a:solidFill>
                   <a:srgbClr val="FFFFFF"/>
                 </a:solidFill>
               </a14:hiddenFill>
             </a:ext>
             <a:ext uri="{91240B29-F687-4f45-9708-019B960494DF}">
-              <a14:hiddenLine xmlns:a14="http://schemas.microsoft.com/office/drawing/2010/main" xmlns="" w="9525">
+              <a14:hiddenLine xmlns="" xmlns:a14="http://schemas.microsoft.com/office/drawing/2010/main" w="9525">
                 <a:solidFill>
                   <a:srgbClr val="000000"/>
                 </a:solidFill>
@@ -3341,14 +3341,14 @@
           <a:effectLst/>
           <a:extLst>
             <a:ext uri="{909E8E84-426E-40dd-AFC4-6F175D3DCCD1}">
-              <a14:hiddenFill xmlns:a14="http://schemas.microsoft.com/office/drawing/2010/main" xmlns="">
+              <a14:hiddenFill xmlns="" xmlns:a14="http://schemas.microsoft.com/office/drawing/2010/main">
                 <a:solidFill>
                   <a:schemeClr val="accent1"/>
                 </a:solidFill>
               </a14:hiddenFill>
             </a:ext>
             <a:ext uri="{91240B29-F687-4f45-9708-019B960494DF}">
-              <a14:hiddenLine xmlns:a14="http://schemas.microsoft.com/office/drawing/2010/main" xmlns="" w="9525">
+              <a14:hiddenLine xmlns="" xmlns:a14="http://schemas.microsoft.com/office/drawing/2010/main" w="9525">
                 <a:solidFill>
                   <a:schemeClr val="tx1"/>
                 </a:solidFill>
@@ -3358,7 +3358,7 @@
               </a14:hiddenLine>
             </a:ext>
             <a:ext uri="{AF507438-7753-43e0-B8FC-AC1667EBCBE1}">
-              <a14:hiddenEffects xmlns:a14="http://schemas.microsoft.com/office/drawing/2010/main" xmlns="">
+              <a14:hiddenEffects xmlns="" xmlns:a14="http://schemas.microsoft.com/office/drawing/2010/main">
                 <a:effectLst>
                   <a:outerShdw blurRad="63500" dist="38099" dir="2700000" algn="ctr" rotWithShape="0">
                     <a:schemeClr val="bg2">
@@ -3384,7 +3384,7 @@
                 <a:latin typeface="Arial" pitchFamily="34" charset="0"/>
               </a:rPr>
               <a:pPr/>
-              <a:t>4/20/26</a:t>
+              <a:t>4/21/26</a:t>
             </a:fld>
             <a:r>
               <a:rPr lang="en-US" sz="900" dirty="0">
@@ -3661,7 +3661,7 @@
           <a:effectLst/>
           <a:extLst>
             <a:ext uri="{91240B29-F687-4f45-9708-019B960494DF}">
-              <a14:hiddenLine xmlns:a14="http://schemas.microsoft.com/office/drawing/2010/main" xmlns="" w="9525">
+              <a14:hiddenLine xmlns="" xmlns:a14="http://schemas.microsoft.com/office/drawing/2010/main" w="9525">
                 <a:solidFill>
                   <a:schemeClr val="tx1"/>
                 </a:solidFill>
@@ -3671,7 +3671,7 @@
               </a14:hiddenLine>
             </a:ext>
             <a:ext uri="{AF507438-7753-43e0-B8FC-AC1667EBCBE1}">
-              <a14:hiddenEffects xmlns:a14="http://schemas.microsoft.com/office/drawing/2010/main" xmlns="">
+              <a14:hiddenEffects xmlns="" xmlns:a14="http://schemas.microsoft.com/office/drawing/2010/main">
                 <a:effectLst>
                   <a:outerShdw blurRad="63500" dist="38099" dir="2700000" algn="ctr" rotWithShape="0">
                     <a:schemeClr val="bg2">
@@ -3721,7 +3721,7 @@
           <a:effectLst/>
           <a:extLst>
             <a:ext uri="{91240B29-F687-4f45-9708-019B960494DF}">
-              <a14:hiddenLine xmlns:a14="http://schemas.microsoft.com/office/drawing/2010/main" xmlns="" w="9525">
+              <a14:hiddenLine xmlns="" xmlns:a14="http://schemas.microsoft.com/office/drawing/2010/main" w="9525">
                 <a:solidFill>
                   <a:schemeClr val="tx1"/>
                 </a:solidFill>
@@ -3731,7 +3731,7 @@
               </a14:hiddenLine>
             </a:ext>
             <a:ext uri="{AF507438-7753-43e0-B8FC-AC1667EBCBE1}">
-              <a14:hiddenEffects xmlns:a14="http://schemas.microsoft.com/office/drawing/2010/main" xmlns="">
+              <a14:hiddenEffects xmlns="" xmlns:a14="http://schemas.microsoft.com/office/drawing/2010/main">
                 <a:effectLst>
                   <a:outerShdw blurRad="63500" dist="38099" dir="2700000" algn="ctr" rotWithShape="0">
                     <a:schemeClr val="bg2">
@@ -3780,14 +3780,14 @@
           <a:effectLst/>
           <a:extLst>
             <a:ext uri="{909E8E84-426E-40dd-AFC4-6F175D3DCCD1}">
-              <a14:hiddenFill xmlns:a14="http://schemas.microsoft.com/office/drawing/2010/main" xmlns="">
+              <a14:hiddenFill xmlns="" xmlns:a14="http://schemas.microsoft.com/office/drawing/2010/main">
                 <a:solidFill>
                   <a:schemeClr val="accent1"/>
                 </a:solidFill>
               </a14:hiddenFill>
             </a:ext>
             <a:ext uri="{91240B29-F687-4f45-9708-019B960494DF}">
-              <a14:hiddenLine xmlns:a14="http://schemas.microsoft.com/office/drawing/2010/main" xmlns="" w="9525">
+              <a14:hiddenLine xmlns="" xmlns:a14="http://schemas.microsoft.com/office/drawing/2010/main" w="9525">
                 <a:solidFill>
                   <a:schemeClr val="tx1"/>
                 </a:solidFill>
@@ -3797,7 +3797,7 @@
               </a14:hiddenLine>
             </a:ext>
             <a:ext uri="{AF507438-7753-43e0-B8FC-AC1667EBCBE1}">
-              <a14:hiddenEffects xmlns:a14="http://schemas.microsoft.com/office/drawing/2010/main" xmlns="">
+              <a14:hiddenEffects xmlns="" xmlns:a14="http://schemas.microsoft.com/office/drawing/2010/main">
                 <a:effectLst>
                   <a:outerShdw blurRad="63500" dist="38099" dir="2700000" algn="ctr" rotWithShape="0">
                     <a:schemeClr val="bg2">
@@ -3823,7 +3823,7 @@
                 <a:latin typeface="Arial" pitchFamily="34" charset="0"/>
               </a:rPr>
               <a:pPr/>
-              <a:t>4/20/26</a:t>
+              <a:t>4/21/26</a:t>
             </a:fld>
             <a:r>
               <a:rPr lang="en-US" sz="900" dirty="0">
@@ -3872,14 +3872,14 @@
           </a:ln>
           <a:extLst>
             <a:ext uri="{909E8E84-426E-40dd-AFC4-6F175D3DCCD1}">
-              <a14:hiddenFill xmlns:a14="http://schemas.microsoft.com/office/drawing/2010/main" xmlns="">
+              <a14:hiddenFill xmlns="" xmlns:a14="http://schemas.microsoft.com/office/drawing/2010/main">
                 <a:solidFill>
                   <a:srgbClr val="FFFFFF"/>
                 </a:solidFill>
               </a14:hiddenFill>
             </a:ext>
             <a:ext uri="{91240B29-F687-4f45-9708-019B960494DF}">
-              <a14:hiddenLine xmlns:a14="http://schemas.microsoft.com/office/drawing/2010/main" xmlns="" w="9525">
+              <a14:hiddenLine xmlns="" xmlns:a14="http://schemas.microsoft.com/office/drawing/2010/main" w="9525">
                 <a:solidFill>
                   <a:srgbClr val="000000"/>
                 </a:solidFill>
@@ -3968,7 +3968,7 @@
           </a:ln>
           <a:extLst>
             <a:ext uri="{909E8E84-426E-40dd-AFC4-6F175D3DCCD1}">
-              <a14:hiddenFill xmlns:a14="http://schemas.microsoft.com/office/drawing/2010/main" xmlns="">
+              <a14:hiddenFill xmlns="" xmlns:a14="http://schemas.microsoft.com/office/drawing/2010/main">
                 <a:solidFill>
                   <a:srgbClr val="FFFFFF"/>
                 </a:solidFill>
@@ -4014,14 +4014,14 @@
           <a:effectLst/>
           <a:extLst>
             <a:ext uri="{909E8E84-426E-40dd-AFC4-6F175D3DCCD1}">
-              <a14:hiddenFill xmlns:a14="http://schemas.microsoft.com/office/drawing/2010/main" xmlns="">
+              <a14:hiddenFill xmlns="" xmlns:a14="http://schemas.microsoft.com/office/drawing/2010/main">
                 <a:solidFill>
                   <a:schemeClr val="accent1"/>
                 </a:solidFill>
               </a14:hiddenFill>
             </a:ext>
             <a:ext uri="{AF507438-7753-43e0-B8FC-AC1667EBCBE1}">
-              <a14:hiddenEffects xmlns:a14="http://schemas.microsoft.com/office/drawing/2010/main" xmlns="">
+              <a14:hiddenEffects xmlns="" xmlns:a14="http://schemas.microsoft.com/office/drawing/2010/main">
                 <a:effectLst>
                   <a:outerShdw blurRad="63500" dist="17961" dir="2700000" algn="ctr" rotWithShape="0">
                     <a:srgbClr val="2F4D71">
@@ -4070,7 +4070,7 @@
           </a:ln>
           <a:extLst>
             <a:ext uri="{909E8E84-426E-40dd-AFC4-6F175D3DCCD1}">
-              <a14:hiddenFill xmlns:a14="http://schemas.microsoft.com/office/drawing/2010/main" xmlns="">
+              <a14:hiddenFill xmlns="" xmlns:a14="http://schemas.microsoft.com/office/drawing/2010/main">
                 <a:solidFill>
                   <a:srgbClr val="FFFFFF"/>
                 </a:solidFill>
@@ -4351,7 +4351,7 @@
           <a:effectLst/>
           <a:extLst>
             <a:ext uri="{91240B29-F687-4f45-9708-019B960494DF}">
-              <a14:hiddenLine xmlns:a14="http://schemas.microsoft.com/office/drawing/2010/main" xmlns="" w="9525">
+              <a14:hiddenLine xmlns="" xmlns:a14="http://schemas.microsoft.com/office/drawing/2010/main" w="9525">
                 <a:solidFill>
                   <a:schemeClr val="tx1"/>
                 </a:solidFill>
@@ -4361,7 +4361,7 @@
               </a14:hiddenLine>
             </a:ext>
             <a:ext uri="{AF507438-7753-43e0-B8FC-AC1667EBCBE1}">
-              <a14:hiddenEffects xmlns:a14="http://schemas.microsoft.com/office/drawing/2010/main" xmlns="">
+              <a14:hiddenEffects xmlns="" xmlns:a14="http://schemas.microsoft.com/office/drawing/2010/main">
                 <a:effectLst>
                   <a:outerShdw blurRad="63500" dist="38099" dir="2700000" algn="ctr" rotWithShape="0">
                     <a:schemeClr val="bg2">
@@ -4411,7 +4411,7 @@
           <a:effectLst/>
           <a:extLst>
             <a:ext uri="{91240B29-F687-4f45-9708-019B960494DF}">
-              <a14:hiddenLine xmlns:a14="http://schemas.microsoft.com/office/drawing/2010/main" xmlns="" w="9525">
+              <a14:hiddenLine xmlns="" xmlns:a14="http://schemas.microsoft.com/office/drawing/2010/main" w="9525">
                 <a:solidFill>
                   <a:schemeClr val="tx1"/>
                 </a:solidFill>
@@ -4421,7 +4421,7 @@
               </a14:hiddenLine>
             </a:ext>
             <a:ext uri="{AF507438-7753-43e0-B8FC-AC1667EBCBE1}">
-              <a14:hiddenEffects xmlns:a14="http://schemas.microsoft.com/office/drawing/2010/main" xmlns="">
+              <a14:hiddenEffects xmlns="" xmlns:a14="http://schemas.microsoft.com/office/drawing/2010/main">
                 <a:effectLst>
                   <a:outerShdw blurRad="63500" dist="38099" dir="2700000" algn="ctr" rotWithShape="0">
                     <a:schemeClr val="bg2">
@@ -4470,14 +4470,14 @@
           <a:effectLst/>
           <a:extLst>
             <a:ext uri="{909E8E84-426E-40dd-AFC4-6F175D3DCCD1}">
-              <a14:hiddenFill xmlns:a14="http://schemas.microsoft.com/office/drawing/2010/main" xmlns="">
+              <a14:hiddenFill xmlns="" xmlns:a14="http://schemas.microsoft.com/office/drawing/2010/main">
                 <a:solidFill>
                   <a:schemeClr val="accent1"/>
                 </a:solidFill>
               </a14:hiddenFill>
             </a:ext>
             <a:ext uri="{91240B29-F687-4f45-9708-019B960494DF}">
-              <a14:hiddenLine xmlns:a14="http://schemas.microsoft.com/office/drawing/2010/main" xmlns="" w="9525">
+              <a14:hiddenLine xmlns="" xmlns:a14="http://schemas.microsoft.com/office/drawing/2010/main" w="9525">
                 <a:solidFill>
                   <a:schemeClr val="tx1"/>
                 </a:solidFill>
@@ -4487,7 +4487,7 @@
               </a14:hiddenLine>
             </a:ext>
             <a:ext uri="{AF507438-7753-43e0-B8FC-AC1667EBCBE1}">
-              <a14:hiddenEffects xmlns:a14="http://schemas.microsoft.com/office/drawing/2010/main" xmlns="">
+              <a14:hiddenEffects xmlns="" xmlns:a14="http://schemas.microsoft.com/office/drawing/2010/main">
                 <a:effectLst>
                   <a:outerShdw blurRad="63500" dist="38099" dir="2700000" algn="ctr" rotWithShape="0">
                     <a:schemeClr val="bg2">
@@ -4513,7 +4513,7 @@
                 <a:latin typeface="Arial" pitchFamily="34" charset="0"/>
               </a:rPr>
               <a:pPr/>
-              <a:t>4/20/26</a:t>
+              <a:t>4/21/26</a:t>
             </a:fld>
             <a:r>
               <a:rPr lang="en-US" sz="900" dirty="0">
@@ -4562,14 +4562,14 @@
           </a:ln>
           <a:extLst>
             <a:ext uri="{909E8E84-426E-40dd-AFC4-6F175D3DCCD1}">
-              <a14:hiddenFill xmlns:a14="http://schemas.microsoft.com/office/drawing/2010/main" xmlns="">
+              <a14:hiddenFill xmlns="" xmlns:a14="http://schemas.microsoft.com/office/drawing/2010/main">
                 <a:solidFill>
                   <a:srgbClr val="FFFFFF"/>
                 </a:solidFill>
               </a14:hiddenFill>
             </a:ext>
             <a:ext uri="{91240B29-F687-4f45-9708-019B960494DF}">
-              <a14:hiddenLine xmlns:a14="http://schemas.microsoft.com/office/drawing/2010/main" xmlns="" w="9525">
+              <a14:hiddenLine xmlns="" xmlns:a14="http://schemas.microsoft.com/office/drawing/2010/main" w="9525">
                 <a:solidFill>
                   <a:srgbClr val="000000"/>
                 </a:solidFill>
@@ -4989,7 +4989,7 @@
           <a:effectLst/>
           <a:extLst>
             <a:ext uri="{91240B29-F687-4f45-9708-019B960494DF}">
-              <a14:hiddenLine xmlns:a14="http://schemas.microsoft.com/office/drawing/2010/main" xmlns="" w="9525">
+              <a14:hiddenLine xmlns="" xmlns:a14="http://schemas.microsoft.com/office/drawing/2010/main" w="9525">
                 <a:solidFill>
                   <a:schemeClr val="tx1"/>
                 </a:solidFill>
@@ -4999,7 +4999,7 @@
               </a14:hiddenLine>
             </a:ext>
             <a:ext uri="{AF507438-7753-43e0-B8FC-AC1667EBCBE1}">
-              <a14:hiddenEffects xmlns:a14="http://schemas.microsoft.com/office/drawing/2010/main" xmlns="">
+              <a14:hiddenEffects xmlns="" xmlns:a14="http://schemas.microsoft.com/office/drawing/2010/main">
                 <a:effectLst>
                   <a:outerShdw blurRad="63500" dist="38099" dir="2700000" algn="ctr" rotWithShape="0">
                     <a:schemeClr val="bg2">
@@ -5049,7 +5049,7 @@
           <a:effectLst/>
           <a:extLst>
             <a:ext uri="{91240B29-F687-4f45-9708-019B960494DF}">
-              <a14:hiddenLine xmlns:a14="http://schemas.microsoft.com/office/drawing/2010/main" xmlns="" w="9525">
+              <a14:hiddenLine xmlns="" xmlns:a14="http://schemas.microsoft.com/office/drawing/2010/main" w="9525">
                 <a:solidFill>
                   <a:schemeClr val="tx1"/>
                 </a:solidFill>
@@ -5059,7 +5059,7 @@
               </a14:hiddenLine>
             </a:ext>
             <a:ext uri="{AF507438-7753-43e0-B8FC-AC1667EBCBE1}">
-              <a14:hiddenEffects xmlns:a14="http://schemas.microsoft.com/office/drawing/2010/main" xmlns="">
+              <a14:hiddenEffects xmlns="" xmlns:a14="http://schemas.microsoft.com/office/drawing/2010/main">
                 <a:effectLst>
                   <a:outerShdw blurRad="63500" dist="38099" dir="2700000" algn="ctr" rotWithShape="0">
                     <a:schemeClr val="bg2">
@@ -5108,14 +5108,14 @@
           <a:effectLst/>
           <a:extLst>
             <a:ext uri="{909E8E84-426E-40dd-AFC4-6F175D3DCCD1}">
-              <a14:hiddenFill xmlns:a14="http://schemas.microsoft.com/office/drawing/2010/main" xmlns="">
+              <a14:hiddenFill xmlns="" xmlns:a14="http://schemas.microsoft.com/office/drawing/2010/main">
                 <a:solidFill>
                   <a:schemeClr val="accent1"/>
                 </a:solidFill>
               </a14:hiddenFill>
             </a:ext>
             <a:ext uri="{91240B29-F687-4f45-9708-019B960494DF}">
-              <a14:hiddenLine xmlns:a14="http://schemas.microsoft.com/office/drawing/2010/main" xmlns="" w="9525">
+              <a14:hiddenLine xmlns="" xmlns:a14="http://schemas.microsoft.com/office/drawing/2010/main" w="9525">
                 <a:solidFill>
                   <a:schemeClr val="tx1"/>
                 </a:solidFill>
@@ -5125,7 +5125,7 @@
               </a14:hiddenLine>
             </a:ext>
             <a:ext uri="{AF507438-7753-43e0-B8FC-AC1667EBCBE1}">
-              <a14:hiddenEffects xmlns:a14="http://schemas.microsoft.com/office/drawing/2010/main" xmlns="">
+              <a14:hiddenEffects xmlns="" xmlns:a14="http://schemas.microsoft.com/office/drawing/2010/main">
                 <a:effectLst>
                   <a:outerShdw blurRad="63500" dist="38099" dir="2700000" algn="ctr" rotWithShape="0">
                     <a:schemeClr val="bg2">
@@ -5151,7 +5151,7 @@
                 <a:latin typeface="Arial" pitchFamily="34" charset="0"/>
               </a:rPr>
               <a:pPr/>
-              <a:t>4/20/26</a:t>
+              <a:t>4/21/26</a:t>
             </a:fld>
             <a:r>
               <a:rPr lang="en-US" sz="900" dirty="0">
@@ -5200,14 +5200,14 @@
           </a:ln>
           <a:extLst>
             <a:ext uri="{909E8E84-426E-40dd-AFC4-6F175D3DCCD1}">
-              <a14:hiddenFill xmlns:a14="http://schemas.microsoft.com/office/drawing/2010/main" xmlns="">
+              <a14:hiddenFill xmlns="" xmlns:a14="http://schemas.microsoft.com/office/drawing/2010/main">
                 <a:solidFill>
                   <a:srgbClr val="FFFFFF"/>
                 </a:solidFill>
               </a14:hiddenFill>
             </a:ext>
             <a:ext uri="{91240B29-F687-4f45-9708-019B960494DF}">
-              <a14:hiddenLine xmlns:a14="http://schemas.microsoft.com/office/drawing/2010/main" xmlns="" w="9525">
+              <a14:hiddenLine xmlns="" xmlns:a14="http://schemas.microsoft.com/office/drawing/2010/main" w="9525">
                 <a:solidFill>
                   <a:srgbClr val="000000"/>
                 </a:solidFill>
@@ -5746,7 +5746,7 @@
           <a:effectLst/>
           <a:extLst>
             <a:ext uri="{91240B29-F687-4f45-9708-019B960494DF}">
-              <a14:hiddenLine xmlns:a14="http://schemas.microsoft.com/office/drawing/2010/main" xmlns="" w="9525">
+              <a14:hiddenLine xmlns="" xmlns:a14="http://schemas.microsoft.com/office/drawing/2010/main" w="9525">
                 <a:solidFill>
                   <a:schemeClr val="tx1"/>
                 </a:solidFill>
@@ -5756,7 +5756,7 @@
               </a14:hiddenLine>
             </a:ext>
             <a:ext uri="{AF507438-7753-43e0-B8FC-AC1667EBCBE1}">
-              <a14:hiddenEffects xmlns:a14="http://schemas.microsoft.com/office/drawing/2010/main" xmlns="">
+              <a14:hiddenEffects xmlns="" xmlns:a14="http://schemas.microsoft.com/office/drawing/2010/main">
                 <a:effectLst>
                   <a:outerShdw blurRad="63500" dist="38099" dir="2700000" algn="ctr" rotWithShape="0">
                     <a:schemeClr val="bg2">
@@ -5806,7 +5806,7 @@
           <a:effectLst/>
           <a:extLst>
             <a:ext uri="{91240B29-F687-4f45-9708-019B960494DF}">
-              <a14:hiddenLine xmlns:a14="http://schemas.microsoft.com/office/drawing/2010/main" xmlns="" w="9525">
+              <a14:hiddenLine xmlns="" xmlns:a14="http://schemas.microsoft.com/office/drawing/2010/main" w="9525">
                 <a:solidFill>
                   <a:schemeClr val="tx1"/>
                 </a:solidFill>
@@ -5816,7 +5816,7 @@
               </a14:hiddenLine>
             </a:ext>
             <a:ext uri="{AF507438-7753-43e0-B8FC-AC1667EBCBE1}">
-              <a14:hiddenEffects xmlns:a14="http://schemas.microsoft.com/office/drawing/2010/main" xmlns="">
+              <a14:hiddenEffects xmlns="" xmlns:a14="http://schemas.microsoft.com/office/drawing/2010/main">
                 <a:effectLst>
                   <a:outerShdw blurRad="63500" dist="38099" dir="2700000" algn="ctr" rotWithShape="0">
                     <a:schemeClr val="bg2">
@@ -5865,14 +5865,14 @@
           <a:effectLst/>
           <a:extLst>
             <a:ext uri="{909E8E84-426E-40dd-AFC4-6F175D3DCCD1}">
-              <a14:hiddenFill xmlns:a14="http://schemas.microsoft.com/office/drawing/2010/main" xmlns="">
+              <a14:hiddenFill xmlns="" xmlns:a14="http://schemas.microsoft.com/office/drawing/2010/main">
                 <a:solidFill>
                   <a:schemeClr val="accent1"/>
                 </a:solidFill>
               </a14:hiddenFill>
             </a:ext>
             <a:ext uri="{91240B29-F687-4f45-9708-019B960494DF}">
-              <a14:hiddenLine xmlns:a14="http://schemas.microsoft.com/office/drawing/2010/main" xmlns="" w="9525">
+              <a14:hiddenLine xmlns="" xmlns:a14="http://schemas.microsoft.com/office/drawing/2010/main" w="9525">
                 <a:solidFill>
                   <a:schemeClr val="tx1"/>
                 </a:solidFill>
@@ -5882,7 +5882,7 @@
               </a14:hiddenLine>
             </a:ext>
             <a:ext uri="{AF507438-7753-43e0-B8FC-AC1667EBCBE1}">
-              <a14:hiddenEffects xmlns:a14="http://schemas.microsoft.com/office/drawing/2010/main" xmlns="">
+              <a14:hiddenEffects xmlns="" xmlns:a14="http://schemas.microsoft.com/office/drawing/2010/main">
                 <a:effectLst>
                   <a:outerShdw blurRad="63500" dist="38099" dir="2700000" algn="ctr" rotWithShape="0">
                     <a:schemeClr val="bg2">
@@ -5908,7 +5908,7 @@
                 <a:latin typeface="Arial" pitchFamily="34" charset="0"/>
               </a:rPr>
               <a:pPr/>
-              <a:t>4/20/26</a:t>
+              <a:t>4/21/26</a:t>
             </a:fld>
             <a:r>
               <a:rPr lang="en-US" sz="900" dirty="0">
@@ -5957,14 +5957,14 @@
           </a:ln>
           <a:extLst>
             <a:ext uri="{909E8E84-426E-40dd-AFC4-6F175D3DCCD1}">
-              <a14:hiddenFill xmlns:a14="http://schemas.microsoft.com/office/drawing/2010/main" xmlns="">
+              <a14:hiddenFill xmlns="" xmlns:a14="http://schemas.microsoft.com/office/drawing/2010/main">
                 <a:solidFill>
                   <a:srgbClr val="FFFFFF"/>
                 </a:solidFill>
               </a14:hiddenFill>
             </a:ext>
             <a:ext uri="{91240B29-F687-4f45-9708-019B960494DF}">
-              <a14:hiddenLine xmlns:a14="http://schemas.microsoft.com/office/drawing/2010/main" xmlns="" w="9525">
+              <a14:hiddenLine xmlns="" xmlns:a14="http://schemas.microsoft.com/office/drawing/2010/main" w="9525">
                 <a:solidFill>
                   <a:srgbClr val="000000"/>
                 </a:solidFill>
@@ -6128,7 +6128,7 @@
           <a:effectLst/>
           <a:extLst>
             <a:ext uri="{91240B29-F687-4f45-9708-019B960494DF}">
-              <a14:hiddenLine xmlns:a14="http://schemas.microsoft.com/office/drawing/2010/main" xmlns="" w="9525">
+              <a14:hiddenLine xmlns="" xmlns:a14="http://schemas.microsoft.com/office/drawing/2010/main" w="9525">
                 <a:solidFill>
                   <a:schemeClr val="tx1"/>
                 </a:solidFill>
@@ -6138,7 +6138,7 @@
               </a14:hiddenLine>
             </a:ext>
             <a:ext uri="{AF507438-7753-43e0-B8FC-AC1667EBCBE1}">
-              <a14:hiddenEffects xmlns:a14="http://schemas.microsoft.com/office/drawing/2010/main" xmlns="">
+              <a14:hiddenEffects xmlns="" xmlns:a14="http://schemas.microsoft.com/office/drawing/2010/main">
                 <a:effectLst>
                   <a:outerShdw blurRad="63500" dist="38099" dir="2700000" algn="ctr" rotWithShape="0">
                     <a:schemeClr val="bg2">
@@ -6188,7 +6188,7 @@
           <a:effectLst/>
           <a:extLst>
             <a:ext uri="{91240B29-F687-4f45-9708-019B960494DF}">
-              <a14:hiddenLine xmlns:a14="http://schemas.microsoft.com/office/drawing/2010/main" xmlns="" w="9525">
+              <a14:hiddenLine xmlns="" xmlns:a14="http://schemas.microsoft.com/office/drawing/2010/main" w="9525">
                 <a:solidFill>
                   <a:schemeClr val="tx1"/>
                 </a:solidFill>
@@ -6198,7 +6198,7 @@
               </a14:hiddenLine>
             </a:ext>
             <a:ext uri="{AF507438-7753-43e0-B8FC-AC1667EBCBE1}">
-              <a14:hiddenEffects xmlns:a14="http://schemas.microsoft.com/office/drawing/2010/main" xmlns="">
+              <a14:hiddenEffects xmlns="" xmlns:a14="http://schemas.microsoft.com/office/drawing/2010/main">
                 <a:effectLst>
                   <a:outerShdw blurRad="63500" dist="38099" dir="2700000" algn="ctr" rotWithShape="0">
                     <a:schemeClr val="bg2">
@@ -6247,14 +6247,14 @@
           <a:effectLst/>
           <a:extLst>
             <a:ext uri="{909E8E84-426E-40dd-AFC4-6F175D3DCCD1}">
-              <a14:hiddenFill xmlns:a14="http://schemas.microsoft.com/office/drawing/2010/main" xmlns="">
+              <a14:hiddenFill xmlns="" xmlns:a14="http://schemas.microsoft.com/office/drawing/2010/main">
                 <a:solidFill>
                   <a:schemeClr val="accent1"/>
                 </a:solidFill>
               </a14:hiddenFill>
             </a:ext>
             <a:ext uri="{91240B29-F687-4f45-9708-019B960494DF}">
-              <a14:hiddenLine xmlns:a14="http://schemas.microsoft.com/office/drawing/2010/main" xmlns="" w="9525">
+              <a14:hiddenLine xmlns="" xmlns:a14="http://schemas.microsoft.com/office/drawing/2010/main" w="9525">
                 <a:solidFill>
                   <a:schemeClr val="tx1"/>
                 </a:solidFill>
@@ -6264,7 +6264,7 @@
               </a14:hiddenLine>
             </a:ext>
             <a:ext uri="{AF507438-7753-43e0-B8FC-AC1667EBCBE1}">
-              <a14:hiddenEffects xmlns:a14="http://schemas.microsoft.com/office/drawing/2010/main" xmlns="">
+              <a14:hiddenEffects xmlns="" xmlns:a14="http://schemas.microsoft.com/office/drawing/2010/main">
                 <a:effectLst>
                   <a:outerShdw blurRad="63500" dist="38099" dir="2700000" algn="ctr" rotWithShape="0">
                     <a:schemeClr val="bg2">
@@ -6290,7 +6290,7 @@
                 <a:latin typeface="Arial" pitchFamily="34" charset="0"/>
               </a:rPr>
               <a:pPr/>
-              <a:t>4/20/26</a:t>
+              <a:t>4/21/26</a:t>
             </a:fld>
             <a:r>
               <a:rPr lang="en-US" sz="900" dirty="0">
@@ -6339,14 +6339,14 @@
           </a:ln>
           <a:extLst>
             <a:ext uri="{909E8E84-426E-40dd-AFC4-6F175D3DCCD1}">
-              <a14:hiddenFill xmlns:a14="http://schemas.microsoft.com/office/drawing/2010/main" xmlns="">
+              <a14:hiddenFill xmlns="" xmlns:a14="http://schemas.microsoft.com/office/drawing/2010/main">
                 <a:solidFill>
                   <a:srgbClr val="FFFFFF"/>
                 </a:solidFill>
               </a14:hiddenFill>
             </a:ext>
             <a:ext uri="{91240B29-F687-4f45-9708-019B960494DF}">
-              <a14:hiddenLine xmlns:a14="http://schemas.microsoft.com/office/drawing/2010/main" xmlns="" w="9525">
+              <a14:hiddenLine xmlns="" xmlns:a14="http://schemas.microsoft.com/office/drawing/2010/main" w="9525">
                 <a:solidFill>
                   <a:srgbClr val="000000"/>
                 </a:solidFill>
@@ -6478,7 +6478,7 @@
           </a:ln>
           <a:extLst>
             <a:ext uri="{91240B29-F687-4f45-9708-019B960494DF}">
-              <a14:hiddenLine xmlns:a14="http://schemas.microsoft.com/office/drawing/2010/main" xmlns="" w="9525">
+              <a14:hiddenLine xmlns="" xmlns:a14="http://schemas.microsoft.com/office/drawing/2010/main" w="9525">
                 <a:solidFill>
                   <a:srgbClr val="000000"/>
                 </a:solidFill>
@@ -6523,7 +6523,7 @@
           <a:effectLst/>
           <a:extLst>
             <a:ext uri="{91240B29-F687-4f45-9708-019B960494DF}">
-              <a14:hiddenLine xmlns:a14="http://schemas.microsoft.com/office/drawing/2010/main" xmlns="" w="9525">
+              <a14:hiddenLine xmlns="" xmlns:a14="http://schemas.microsoft.com/office/drawing/2010/main" w="9525">
                 <a:solidFill>
                   <a:schemeClr val="tx1"/>
                 </a:solidFill>
@@ -6533,7 +6533,7 @@
               </a14:hiddenLine>
             </a:ext>
             <a:ext uri="{AF507438-7753-43e0-B8FC-AC1667EBCBE1}">
-              <a14:hiddenEffects xmlns:a14="http://schemas.microsoft.com/office/drawing/2010/main" xmlns="">
+              <a14:hiddenEffects xmlns="" xmlns:a14="http://schemas.microsoft.com/office/drawing/2010/main">
                 <a:effectLst>
                   <a:outerShdw blurRad="63500" dist="38099" dir="2700000" algn="ctr" rotWithShape="0">
                     <a:schemeClr val="bg2">
@@ -6586,12 +6586,12 @@
           <a:effectLst/>
           <a:extLst>
             <a:ext uri="{909E8E84-426E-40dd-AFC4-6F175D3DCCD1}">
-              <a14:hiddenFill xmlns:a14="http://schemas.microsoft.com/office/drawing/2010/main" xmlns="">
+              <a14:hiddenFill xmlns="" xmlns:a14="http://schemas.microsoft.com/office/drawing/2010/main">
                 <a:noFill/>
               </a14:hiddenFill>
             </a:ext>
             <a:ext uri="{AF507438-7753-43e0-B8FC-AC1667EBCBE1}">
-              <a14:hiddenEffects xmlns:a14="http://schemas.microsoft.com/office/drawing/2010/main" xmlns="">
+              <a14:hiddenEffects xmlns="" xmlns:a14="http://schemas.microsoft.com/office/drawing/2010/main">
                 <a:effectLst>
                   <a:outerShdw blurRad="63500" dist="38099" dir="2700000" algn="ctr" rotWithShape="0">
                     <a:schemeClr val="bg2">
@@ -6639,14 +6639,14 @@
           <a:effectLst/>
           <a:extLst>
             <a:ext uri="{909E8E84-426E-40dd-AFC4-6F175D3DCCD1}">
-              <a14:hiddenFill xmlns:a14="http://schemas.microsoft.com/office/drawing/2010/main" xmlns="">
+              <a14:hiddenFill xmlns="" xmlns:a14="http://schemas.microsoft.com/office/drawing/2010/main">
                 <a:solidFill>
                   <a:schemeClr val="accent1"/>
                 </a:solidFill>
               </a14:hiddenFill>
             </a:ext>
             <a:ext uri="{91240B29-F687-4f45-9708-019B960494DF}">
-              <a14:hiddenLine xmlns:a14="http://schemas.microsoft.com/office/drawing/2010/main" xmlns="" w="9525">
+              <a14:hiddenLine xmlns="" xmlns:a14="http://schemas.microsoft.com/office/drawing/2010/main" w="9525">
                 <a:solidFill>
                   <a:schemeClr val="tx1"/>
                 </a:solidFill>
@@ -6656,7 +6656,7 @@
               </a14:hiddenLine>
             </a:ext>
             <a:ext uri="{AF507438-7753-43e0-B8FC-AC1667EBCBE1}">
-              <a14:hiddenEffects xmlns:a14="http://schemas.microsoft.com/office/drawing/2010/main" xmlns="">
+              <a14:hiddenEffects xmlns="" xmlns:a14="http://schemas.microsoft.com/office/drawing/2010/main">
                 <a:effectLst>
                   <a:outerShdw blurRad="63500" dist="38099" dir="2700000" algn="ctr" rotWithShape="0">
                     <a:schemeClr val="bg2">
@@ -6682,7 +6682,7 @@
                 <a:latin typeface="Arial" pitchFamily="34" charset="0"/>
               </a:rPr>
               <a:pPr/>
-              <a:t>4/20/26</a:t>
+              <a:t>4/21/26</a:t>
             </a:fld>
             <a:r>
               <a:rPr lang="en-US" sz="900">
@@ -6719,14 +6719,14 @@
           <a:effectLst/>
           <a:extLst>
             <a:ext uri="{909E8E84-426E-40dd-AFC4-6F175D3DCCD1}">
-              <a14:hiddenFill xmlns:a14="http://schemas.microsoft.com/office/drawing/2010/main" xmlns="">
+              <a14:hiddenFill xmlns="" xmlns:a14="http://schemas.microsoft.com/office/drawing/2010/main">
                 <a:solidFill>
                   <a:schemeClr val="accent1"/>
                 </a:solidFill>
               </a14:hiddenFill>
             </a:ext>
             <a:ext uri="{91240B29-F687-4f45-9708-019B960494DF}">
-              <a14:hiddenLine xmlns:a14="http://schemas.microsoft.com/office/drawing/2010/main" xmlns="" w="9525">
+              <a14:hiddenLine xmlns="" xmlns:a14="http://schemas.microsoft.com/office/drawing/2010/main" w="9525">
                 <a:solidFill>
                   <a:schemeClr val="tx1"/>
                 </a:solidFill>
@@ -6736,7 +6736,7 @@
               </a14:hiddenLine>
             </a:ext>
             <a:ext uri="{AF507438-7753-43e0-B8FC-AC1667EBCBE1}">
-              <a14:hiddenEffects xmlns:a14="http://schemas.microsoft.com/office/drawing/2010/main" xmlns="">
+              <a14:hiddenEffects xmlns="" xmlns:a14="http://schemas.microsoft.com/office/drawing/2010/main">
                 <a:effectLst>
                   <a:outerShdw blurRad="63500" dist="38099" dir="2700000" algn="ctr" rotWithShape="0">
                     <a:schemeClr val="bg2">
@@ -6803,14 +6803,14 @@
           <a:effectLst/>
           <a:extLst>
             <a:ext uri="{909E8E84-426E-40dd-AFC4-6F175D3DCCD1}">
-              <a14:hiddenFill xmlns:a14="http://schemas.microsoft.com/office/drawing/2010/main" xmlns="">
+              <a14:hiddenFill xmlns="" xmlns:a14="http://schemas.microsoft.com/office/drawing/2010/main">
                 <a:solidFill>
                   <a:schemeClr val="accent1"/>
                 </a:solidFill>
               </a14:hiddenFill>
             </a:ext>
             <a:ext uri="{91240B29-F687-4f45-9708-019B960494DF}">
-              <a14:hiddenLine xmlns:a14="http://schemas.microsoft.com/office/drawing/2010/main" xmlns="" w="9525">
+              <a14:hiddenLine xmlns="" xmlns:a14="http://schemas.microsoft.com/office/drawing/2010/main" w="9525">
                 <a:solidFill>
                   <a:schemeClr val="tx1"/>
                 </a:solidFill>
@@ -6820,7 +6820,7 @@
               </a14:hiddenLine>
             </a:ext>
             <a:ext uri="{AF507438-7753-43e0-B8FC-AC1667EBCBE1}">
-              <a14:hiddenEffects xmlns:a14="http://schemas.microsoft.com/office/drawing/2010/main" xmlns="">
+              <a14:hiddenEffects xmlns="" xmlns:a14="http://schemas.microsoft.com/office/drawing/2010/main">
                 <a:effectLst>
                   <a:outerShdw blurRad="63500" dist="38099" dir="2700000" algn="ctr" rotWithShape="0">
                     <a:schemeClr val="bg2">
@@ -6890,14 +6890,14 @@
           </a:ln>
           <a:extLst>
             <a:ext uri="{909E8E84-426E-40dd-AFC4-6F175D3DCCD1}">
-              <a14:hiddenFill xmlns:a14="http://schemas.microsoft.com/office/drawing/2010/main" xmlns="">
+              <a14:hiddenFill xmlns="" xmlns:a14="http://schemas.microsoft.com/office/drawing/2010/main">
                 <a:solidFill>
                   <a:srgbClr val="FFFFFF"/>
                 </a:solidFill>
               </a14:hiddenFill>
             </a:ext>
             <a:ext uri="{91240B29-F687-4f45-9708-019B960494DF}">
-              <a14:hiddenLine xmlns:a14="http://schemas.microsoft.com/office/drawing/2010/main" xmlns="" w="9525">
+              <a14:hiddenLine xmlns="" xmlns:a14="http://schemas.microsoft.com/office/drawing/2010/main" w="9525">
                 <a:solidFill>
                   <a:srgbClr val="000000"/>
                 </a:solidFill>
@@ -7984,6 +7984,45 @@
           </a:extLst>
         </p:spPr>
       </p:pic>
+      <p:sp>
+        <p:nvSpPr>
+          <p:cNvPr id="3" name="TextBox 2">
+            <a:extLst>
+              <a:ext uri="{FF2B5EF4-FFF2-40B4-BE49-F238E27FC236}">
+                <a16:creationId xmlns:a16="http://schemas.microsoft.com/office/drawing/2014/main" id="{1A3012EF-569F-03DC-6F60-05D4A0803795}"/>
+              </a:ext>
+            </a:extLst>
+          </p:cNvPr>
+          <p:cNvSpPr txBox="1"/>
+          <p:nvPr/>
+        </p:nvSpPr>
+        <p:spPr>
+          <a:xfrm>
+            <a:off x="2411760" y="4227934"/>
+            <a:ext cx="180000" cy="216000"/>
+          </a:xfrm>
+          <a:prstGeom prst="rect">
+            <a:avLst/>
+          </a:prstGeom>
+          <a:solidFill>
+            <a:schemeClr val="bg2"/>
+          </a:solidFill>
+        </p:spPr>
+        <p:txBody>
+          <a:bodyPr wrap="none" rtlCol="0">
+            <a:spAutoFit/>
+          </a:bodyPr>
+          <a:lstStyle/>
+          <a:p>
+            <a:r>
+              <a:rPr lang="en-GB" sz="1050" dirty="0">
+                <a:latin typeface="Arial"/>
+              </a:rPr>
+              <a:t>2</a:t>
+            </a:r>
+          </a:p>
+        </p:txBody>
+      </p:sp>
     </p:spTree>
     <p:extLst>
       <p:ext uri="{BB962C8B-B14F-4D97-AF65-F5344CB8AC3E}">
@@ -8375,7 +8414,7 @@
           <a:effectLst/>
           <a:extLst>
             <a:ext uri="{AF507438-7753-43e0-B8FC-AC1667EBCBE1}">
-              <a14:hiddenEffects xmlns="" xmlns:a14="http://schemas.microsoft.com/office/drawing/2010/main">
+              <a14:hiddenEffects xmlns:a14="http://schemas.microsoft.com/office/drawing/2010/main" xmlns="">
                 <a:effectLst>
                   <a:outerShdw blurRad="63500" dist="38099" dir="2700000" algn="ctr" rotWithShape="0">
                     <a:schemeClr val="bg2">
@@ -8470,7 +8509,7 @@
           <a:effectLst/>
           <a:extLst>
             <a:ext uri="{AF507438-7753-43e0-B8FC-AC1667EBCBE1}">
-              <a14:hiddenEffects xmlns="" xmlns:a14="http://schemas.microsoft.com/office/drawing/2010/main">
+              <a14:hiddenEffects xmlns:a14="http://schemas.microsoft.com/office/drawing/2010/main" xmlns="">
                 <a:effectLst>
                   <a:outerShdw blurRad="63500" dist="38099" dir="2700000" algn="ctr" rotWithShape="0">
                     <a:schemeClr val="bg2">
@@ -8881,7 +8920,7 @@
           <a:effectLst/>
           <a:extLst>
             <a:ext uri="{AF507438-7753-43e0-B8FC-AC1667EBCBE1}">
-              <a14:hiddenEffects xmlns:a14="http://schemas.microsoft.com/office/drawing/2010/main" xmlns="">
+              <a14:hiddenEffects xmlns="" xmlns:a14="http://schemas.microsoft.com/office/drawing/2010/main">
                 <a:effectLst>
                   <a:outerShdw blurRad="63500" dist="38099" dir="2700000" algn="ctr" rotWithShape="0">
                     <a:schemeClr val="bg2">
@@ -9422,7 +9461,7 @@
           <a:effectLst/>
           <a:extLst>
             <a:ext uri="{AF507438-7753-43e0-B8FC-AC1667EBCBE1}">
-              <a14:hiddenEffects xmlns:a14="http://schemas.microsoft.com/office/drawing/2010/main" xmlns="">
+              <a14:hiddenEffects xmlns="" xmlns:a14="http://schemas.microsoft.com/office/drawing/2010/main">
                 <a:effectLst>
                   <a:outerShdw blurRad="63500" dist="38099" dir="2700000" algn="ctr" rotWithShape="0">
                     <a:schemeClr val="bg2">
@@ -9554,7 +9593,7 @@
           <a:effectLst/>
           <a:extLst>
             <a:ext uri="{AF507438-7753-43e0-B8FC-AC1667EBCBE1}">
-              <a14:hiddenEffects xmlns="" xmlns:a14="http://schemas.microsoft.com/office/drawing/2010/main">
+              <a14:hiddenEffects xmlns:a14="http://schemas.microsoft.com/office/drawing/2010/main" xmlns="">
                 <a:effectLst>
                   <a:outerShdw blurRad="63500" dist="38099" dir="2700000" algn="ctr" rotWithShape="0">
                     <a:schemeClr val="bg2">
@@ -9857,7 +9896,7 @@
           <a:effectLst/>
           <a:extLst>
             <a:ext uri="{AF507438-7753-43e0-B8FC-AC1667EBCBE1}">
-              <a14:hiddenEffects xmlns:a14="http://schemas.microsoft.com/office/drawing/2010/main" xmlns="">
+              <a14:hiddenEffects xmlns="" xmlns:a14="http://schemas.microsoft.com/office/drawing/2010/main">
                 <a:effectLst>
                   <a:outerShdw blurRad="63500" dist="38099" dir="2700000" algn="ctr" rotWithShape="0">
                     <a:schemeClr val="bg2">
@@ -10273,7 +10312,7 @@
           <a:effectLst/>
           <a:extLst>
             <a:ext uri="{AF507438-7753-43e0-B8FC-AC1667EBCBE1}">
-              <a14:hiddenEffects xmlns="" xmlns:a14="http://schemas.microsoft.com/office/drawing/2010/main">
+              <a14:hiddenEffects xmlns:a14="http://schemas.microsoft.com/office/drawing/2010/main" xmlns="">
                 <a:effectLst>
                   <a:outerShdw blurRad="63500" dist="38099" dir="2700000" algn="ctr" rotWithShape="0">
                     <a:schemeClr val="bg2">
@@ -10689,7 +10728,7 @@
           <a:effectLst/>
           <a:extLst>
             <a:ext uri="{AF507438-7753-43e0-B8FC-AC1667EBCBE1}">
-              <a14:hiddenEffects xmlns="" xmlns:a14="http://schemas.microsoft.com/office/drawing/2010/main">
+              <a14:hiddenEffects xmlns:a14="http://schemas.microsoft.com/office/drawing/2010/main" xmlns="">
                 <a:effectLst>
                   <a:outerShdw blurRad="63500" dist="38099" dir="2700000" algn="ctr" rotWithShape="0">
                     <a:schemeClr val="bg2">
@@ -11105,7 +11144,7 @@
           <a:effectLst/>
           <a:extLst>
             <a:ext uri="{AF507438-7753-43e0-B8FC-AC1667EBCBE1}">
-              <a14:hiddenEffects xmlns:a14="http://schemas.microsoft.com/office/drawing/2010/main" xmlns="">
+              <a14:hiddenEffects xmlns="" xmlns:a14="http://schemas.microsoft.com/office/drawing/2010/main">
                 <a:effectLst>
                   <a:outerShdw blurRad="63500" dist="38099" dir="2700000" algn="ctr" rotWithShape="0">
                     <a:schemeClr val="bg2">
@@ -11627,7 +11666,7 @@
           <a:effectLst/>
           <a:extLst>
             <a:ext uri="{AF507438-7753-43e0-B8FC-AC1667EBCBE1}">
-              <a14:hiddenEffects xmlns="" xmlns:a14="http://schemas.microsoft.com/office/drawing/2010/main">
+              <a14:hiddenEffects xmlns:a14="http://schemas.microsoft.com/office/drawing/2010/main" xmlns="">
                 <a:effectLst>
                   <a:outerShdw blurRad="63500" dist="38099" dir="2700000" algn="ctr" rotWithShape="0">
                     <a:schemeClr val="bg2">
@@ -11759,7 +11798,7 @@
           <a:effectLst/>
           <a:extLst>
             <a:ext uri="{AF507438-7753-43e0-B8FC-AC1667EBCBE1}">
-              <a14:hiddenEffects xmlns:a14="http://schemas.microsoft.com/office/drawing/2010/main" xmlns="">
+              <a14:hiddenEffects xmlns="" xmlns:a14="http://schemas.microsoft.com/office/drawing/2010/main">
                 <a:effectLst>
                   <a:outerShdw blurRad="63500" dist="38099" dir="2700000" algn="ctr" rotWithShape="0">
                     <a:schemeClr val="bg2">
@@ -11800,7 +11839,7 @@
           </a:ln>
           <a:extLst>
             <a:ext uri="{AF507438-7753-43e0-B8FC-AC1667EBCBE1}">
-              <a14:hiddenEffects xmlns:a14="http://schemas.microsoft.com/office/drawing/2010/main" xmlns="">
+              <a14:hiddenEffects xmlns="" xmlns:a14="http://schemas.microsoft.com/office/drawing/2010/main">
                 <a:effectLst>
                   <a:outerShdw blurRad="63500" dist="38099" dir="2700000" algn="ctr" rotWithShape="0">
                     <a:schemeClr val="bg2">
@@ -12363,7 +12402,7 @@
           <a:effectLst/>
           <a:extLst>
             <a:ext uri="{AF507438-7753-43e0-B8FC-AC1667EBCBE1}">
-              <a14:hiddenEffects xmlns="" xmlns:a14="http://schemas.microsoft.com/office/drawing/2010/main">
+              <a14:hiddenEffects xmlns:a14="http://schemas.microsoft.com/office/drawing/2010/main" xmlns="">
                 <a:effectLst>
                   <a:outerShdw blurRad="63500" dist="38099" dir="2700000" algn="ctr" rotWithShape="0">
                     <a:schemeClr val="bg2">
@@ -12692,7 +12731,7 @@
         <p:spPr>
           <a:xfrm>
             <a:off x="1069338" y="3117191"/>
-            <a:ext cx="3829895" cy="707886"/>
+            <a:ext cx="4100803" cy="707886"/>
           </a:xfrm>
           <a:prstGeom prst="rect">
             <a:avLst/>
@@ -12750,8 +12789,23 @@
                 </a:solidFill>
                 <a:latin typeface="Arial"/>
               </a:rPr>
-              <a:t> &amp; torch</a:t>
-            </a:r>
+              <a:t> &amp; </a:t>
+            </a:r>
+            <a:r>
+              <a:rPr lang="en-GB" sz="2000" i="1" dirty="0" err="1">
+                <a:solidFill>
+                  <a:srgbClr val="0070C0"/>
+                </a:solidFill>
+                <a:latin typeface="Arial"/>
+              </a:rPr>
+              <a:t>pytorch</a:t>
+            </a:r>
+            <a:endParaRPr lang="en-GB" sz="2000" i="1" dirty="0">
+              <a:solidFill>
+                <a:srgbClr val="0070C0"/>
+              </a:solidFill>
+              <a:latin typeface="Arial"/>
+            </a:endParaRPr>
           </a:p>
         </p:txBody>
       </p:sp>
@@ -13133,7 +13187,7 @@
         <p:spPr>
           <a:xfrm>
             <a:off x="1057275" y="1624881"/>
-            <a:ext cx="5295039" cy="400110"/>
+            <a:ext cx="6890028" cy="400110"/>
           </a:xfrm>
           <a:prstGeom prst="rect">
             <a:avLst/>
@@ -13150,8 +13204,17 @@
               <a:rPr lang="en-GB" sz="2000" dirty="0">
                 <a:latin typeface="Arial"/>
               </a:rPr>
-              <a:t>- Blocks 5 to 6: Define the model architecture</a:t>
-            </a:r>
+              <a:t>- Blocks 5 to 6: Define the model architecture using </a:t>
+            </a:r>
+            <a:r>
+              <a:rPr lang="en-GB" sz="2000" dirty="0" err="1">
+                <a:latin typeface="Arial"/>
+              </a:rPr>
+              <a:t>pytorch</a:t>
+            </a:r>
+            <a:endParaRPr lang="en-GB" sz="2000" dirty="0">
+              <a:latin typeface="Arial"/>
+            </a:endParaRPr>
           </a:p>
         </p:txBody>
       </p:sp>
@@ -13165,13 +13228,13 @@
   <p:clrMapOvr>
     <a:masterClrMapping/>
   </p:clrMapOvr>
-  <mc:AlternateContent xmlns:mc="http://schemas.openxmlformats.org/markup-compatibility/2006">
-    <mc:Choice xmlns:p159="http://schemas.microsoft.com/office/powerpoint/2015/09/main" Requires="p159">
+  <mc:AlternateContent xmlns:mc="http://schemas.openxmlformats.org/markup-compatibility/2006" xmlns:p159="http://schemas.microsoft.com/office/powerpoint/2015/09/main">
+    <mc:Choice Requires="p159">
       <p:transition xmlns:p14="http://schemas.microsoft.com/office/powerpoint/2010/main" spd="slow" p14:dur="2000">
         <p159:morph option="byObject"/>
       </p:transition>
     </mc:Choice>
-    <mc:Fallback>
+    <mc:Fallback xmlns="">
       <p:transition spd="slow">
         <p:fade/>
       </p:transition>
@@ -13445,7 +13508,7 @@
           <a:effectLst/>
           <a:extLst>
             <a:ext uri="{AF507438-7753-43e0-B8FC-AC1667EBCBE1}">
-              <a14:hiddenEffects xmlns="" xmlns:a14="http://schemas.microsoft.com/office/drawing/2010/main">
+              <a14:hiddenEffects xmlns:a14="http://schemas.microsoft.com/office/drawing/2010/main" xmlns="">
                 <a:effectLst>
                   <a:outerShdw blurRad="63500" dist="38099" dir="2700000" algn="ctr" rotWithShape="0">
                     <a:schemeClr val="bg2">
@@ -13926,7 +13989,7 @@
           <a:effectLst/>
           <a:extLst>
             <a:ext uri="{AF507438-7753-43e0-B8FC-AC1667EBCBE1}">
-              <a14:hiddenEffects xmlns:a14="http://schemas.microsoft.com/office/drawing/2010/main" xmlns="">
+              <a14:hiddenEffects xmlns="" xmlns:a14="http://schemas.microsoft.com/office/drawing/2010/main">
                 <a:effectLst>
                   <a:outerShdw blurRad="63500" dist="38099" dir="2700000" algn="ctr" rotWithShape="0">
                     <a:schemeClr val="bg2">
@@ -14205,7 +14268,7 @@
           <a:effectLst/>
           <a:extLst>
             <a:ext uri="{AF507438-7753-43e0-B8FC-AC1667EBCBE1}">
-              <a14:hiddenEffects xmlns:a14="http://schemas.microsoft.com/office/drawing/2010/main" xmlns="">
+              <a14:hiddenEffects xmlns="" xmlns:a14="http://schemas.microsoft.com/office/drawing/2010/main">
                 <a:effectLst>
                   <a:outerShdw blurRad="63500" dist="38099" dir="2700000" algn="ctr" rotWithShape="0">
                     <a:schemeClr val="bg2">
@@ -14508,7 +14571,7 @@
           <a:effectLst/>
           <a:extLst>
             <a:ext uri="{AF507438-7753-43e0-B8FC-AC1667EBCBE1}">
-              <a14:hiddenEffects xmlns="" xmlns:a14="http://schemas.microsoft.com/office/drawing/2010/main">
+              <a14:hiddenEffects xmlns:a14="http://schemas.microsoft.com/office/drawing/2010/main" xmlns="">
                 <a:effectLst>
                   <a:outerShdw blurRad="63500" dist="38099" dir="2700000" algn="ctr" rotWithShape="0">
                     <a:schemeClr val="bg2">
@@ -15014,7 +15077,7 @@
           <a:effectLst/>
           <a:extLst>
             <a:ext uri="{AF507438-7753-43e0-B8FC-AC1667EBCBE1}">
-              <a14:hiddenEffects xmlns:a14="http://schemas.microsoft.com/office/drawing/2010/main" xmlns="">
+              <a14:hiddenEffects xmlns="" xmlns:a14="http://schemas.microsoft.com/office/drawing/2010/main">
                 <a:effectLst>
                   <a:outerShdw blurRad="63500" dist="38099" dir="2700000" algn="ctr" rotWithShape="0">
                     <a:schemeClr val="bg2">
@@ -15503,7 +15566,7 @@
           <a:effectLst/>
           <a:extLst>
             <a:ext uri="{AF507438-7753-43e0-B8FC-AC1667EBCBE1}">
-              <a14:hiddenEffects xmlns="" xmlns:a14="http://schemas.microsoft.com/office/drawing/2010/main">
+              <a14:hiddenEffects xmlns:a14="http://schemas.microsoft.com/office/drawing/2010/main" xmlns="">
                 <a:effectLst>
                   <a:outerShdw blurRad="63500" dist="38099" dir="2700000" algn="ctr" rotWithShape="0">
                     <a:schemeClr val="bg2">
@@ -16067,7 +16130,7 @@
           <a:effectLst/>
           <a:extLst>
             <a:ext uri="{AF507438-7753-43e0-B8FC-AC1667EBCBE1}">
-              <a14:hiddenEffects xmlns="" xmlns:a14="http://schemas.microsoft.com/office/drawing/2010/main">
+              <a14:hiddenEffects xmlns:a14="http://schemas.microsoft.com/office/drawing/2010/main" xmlns="">
                 <a:effectLst>
                   <a:outerShdw blurRad="63500" dist="38099" dir="2700000" algn="ctr" rotWithShape="0">
                     <a:schemeClr val="bg2">
@@ -16276,7 +16339,7 @@
           <a:effectLst/>
           <a:extLst>
             <a:ext uri="{AF507438-7753-43e0-B8FC-AC1667EBCBE1}">
-              <a14:hiddenEffects xmlns="" xmlns:a14="http://schemas.microsoft.com/office/drawing/2010/main">
+              <a14:hiddenEffects xmlns:a14="http://schemas.microsoft.com/office/drawing/2010/main" xmlns="">
                 <a:effectLst>
                   <a:outerShdw blurRad="63500" dist="38099" dir="2700000" algn="ctr" rotWithShape="0">
                     <a:schemeClr val="bg2">
@@ -16414,7 +16477,7 @@
           <a:effectLst/>
           <a:extLst>
             <a:ext uri="{AF507438-7753-43e0-B8FC-AC1667EBCBE1}">
-              <a14:hiddenEffects xmlns="" xmlns:a14="http://schemas.microsoft.com/office/drawing/2010/main">
+              <a14:hiddenEffects xmlns:a14="http://schemas.microsoft.com/office/drawing/2010/main" xmlns="">
                 <a:effectLst>
                   <a:outerShdw blurRad="63500" dist="38099" dir="2700000" algn="ctr" rotWithShape="0">
                     <a:schemeClr val="bg2">
@@ -16734,7 +16797,7 @@
           <a:effectLst/>
           <a:extLst>
             <a:ext uri="{AF507438-7753-43e0-B8FC-AC1667EBCBE1}">
-              <a14:hiddenEffects xmlns:a14="http://schemas.microsoft.com/office/drawing/2010/main" xmlns="">
+              <a14:hiddenEffects xmlns="" xmlns:a14="http://schemas.microsoft.com/office/drawing/2010/main">
                 <a:effectLst>
                   <a:outerShdw blurRad="63500" dist="38099" dir="2700000" algn="ctr" rotWithShape="0">
                     <a:schemeClr val="bg2">
@@ -16949,7 +17012,7 @@
           <a:effectLst/>
           <a:extLst>
             <a:ext uri="{AF507438-7753-43e0-B8FC-AC1667EBCBE1}">
-              <a14:hiddenEffects xmlns="" xmlns:a14="http://schemas.microsoft.com/office/drawing/2010/main">
+              <a14:hiddenEffects xmlns:a14="http://schemas.microsoft.com/office/drawing/2010/main" xmlns="">
                 <a:effectLst>
                   <a:outerShdw blurRad="63500" dist="38099" dir="2700000" algn="ctr" rotWithShape="0">
                     <a:schemeClr val="bg2">
@@ -16995,7 +17058,7 @@
           <a:effectLst/>
           <a:extLst>
             <a:ext uri="{AF507438-7753-43e0-B8FC-AC1667EBCBE1}">
-              <a14:hiddenEffects xmlns="" xmlns:a14="http://schemas.microsoft.com/office/drawing/2010/main">
+              <a14:hiddenEffects xmlns:a14="http://schemas.microsoft.com/office/drawing/2010/main" xmlns="">
                 <a:effectLst>
                   <a:outerShdw blurRad="63500" dist="38099" dir="2700000" algn="ctr" rotWithShape="0">
                     <a:schemeClr val="bg2">
@@ -17082,7 +17145,7 @@
           <a:effectLst/>
           <a:extLst>
             <a:ext uri="{AF507438-7753-43e0-B8FC-AC1667EBCBE1}">
-              <a14:hiddenEffects xmlns="" xmlns:a14="http://schemas.microsoft.com/office/drawing/2010/main">
+              <a14:hiddenEffects xmlns:a14="http://schemas.microsoft.com/office/drawing/2010/main" xmlns="">
                 <a:effectLst>
                   <a:outerShdw blurRad="63500" dist="38099" dir="2700000" algn="ctr" rotWithShape="0">
                     <a:schemeClr val="bg2">
@@ -17132,7 +17195,7 @@
           <a:effectLst/>
           <a:extLst>
             <a:ext uri="{AF507438-7753-43e0-B8FC-AC1667EBCBE1}">
-              <a14:hiddenEffects xmlns="" xmlns:a14="http://schemas.microsoft.com/office/drawing/2010/main">
+              <a14:hiddenEffects xmlns:a14="http://schemas.microsoft.com/office/drawing/2010/main" xmlns="">
                 <a:effectLst>
                   <a:outerShdw blurRad="63500" dist="38099" dir="2700000" algn="ctr" rotWithShape="0">
                     <a:schemeClr val="bg2">
@@ -17577,7 +17640,7 @@
           <a:effectLst/>
           <a:extLst>
             <a:ext uri="{AF507438-7753-43e0-B8FC-AC1667EBCBE1}">
-              <a14:hiddenEffects xmlns:a14="http://schemas.microsoft.com/office/drawing/2010/main" xmlns="">
+              <a14:hiddenEffects xmlns="" xmlns:a14="http://schemas.microsoft.com/office/drawing/2010/main">
                 <a:effectLst>
                   <a:outerShdw blurRad="63500" dist="38099" dir="2700000" algn="ctr" rotWithShape="0">
                     <a:schemeClr val="bg2">
@@ -17822,7 +17885,7 @@
           <a:effectLst/>
           <a:extLst>
             <a:ext uri="{AF507438-7753-43e0-B8FC-AC1667EBCBE1}">
-              <a14:hiddenEffects xmlns="" xmlns:a14="http://schemas.microsoft.com/office/drawing/2010/main">
+              <a14:hiddenEffects xmlns:a14="http://schemas.microsoft.com/office/drawing/2010/main" xmlns="">
                 <a:effectLst>
                   <a:outerShdw blurRad="63500" dist="38099" dir="2700000" algn="ctr" rotWithShape="0">
                     <a:schemeClr val="bg2">
@@ -17868,7 +17931,7 @@
           <a:effectLst/>
           <a:extLst>
             <a:ext uri="{AF507438-7753-43e0-B8FC-AC1667EBCBE1}">
-              <a14:hiddenEffects xmlns="" xmlns:a14="http://schemas.microsoft.com/office/drawing/2010/main">
+              <a14:hiddenEffects xmlns:a14="http://schemas.microsoft.com/office/drawing/2010/main" xmlns="">
                 <a:effectLst>
                   <a:outerShdw blurRad="63500" dist="38099" dir="2700000" algn="ctr" rotWithShape="0">
                     <a:schemeClr val="bg2">
@@ -18052,7 +18115,7 @@
           <a:effectLst/>
           <a:extLst>
             <a:ext uri="{AF507438-7753-43e0-B8FC-AC1667EBCBE1}">
-              <a14:hiddenEffects xmlns="" xmlns:a14="http://schemas.microsoft.com/office/drawing/2010/main">
+              <a14:hiddenEffects xmlns:a14="http://schemas.microsoft.com/office/drawing/2010/main" xmlns="">
                 <a:effectLst>
                   <a:outerShdw blurRad="63500" dist="38099" dir="2700000" algn="ctr" rotWithShape="0">
                     <a:schemeClr val="bg2">
@@ -18142,7 +18205,7 @@
           <a:effectLst/>
           <a:extLst>
             <a:ext uri="{AF507438-7753-43e0-B8FC-AC1667EBCBE1}">
-              <a14:hiddenEffects xmlns="" xmlns:a14="http://schemas.microsoft.com/office/drawing/2010/main">
+              <a14:hiddenEffects xmlns:a14="http://schemas.microsoft.com/office/drawing/2010/main" xmlns="">
                 <a:effectLst>
                   <a:outerShdw blurRad="63500" dist="38099" dir="2700000" algn="ctr" rotWithShape="0">
                     <a:schemeClr val="bg2">
@@ -18225,7 +18288,7 @@
           <a:effectLst/>
           <a:extLst>
             <a:ext uri="{AF507438-7753-43e0-B8FC-AC1667EBCBE1}">
-              <a14:hiddenEffects xmlns="" xmlns:a14="http://schemas.microsoft.com/office/drawing/2010/main">
+              <a14:hiddenEffects xmlns:a14="http://schemas.microsoft.com/office/drawing/2010/main" xmlns="">
                 <a:effectLst>
                   <a:outerShdw blurRad="63500" dist="38099" dir="2700000" algn="ctr" rotWithShape="0">
                     <a:schemeClr val="bg2">
@@ -18449,7 +18512,7 @@
           <a:effectLst/>
           <a:extLst>
             <a:ext uri="{AF507438-7753-43e0-B8FC-AC1667EBCBE1}">
-              <a14:hiddenEffects xmlns="" xmlns:a14="http://schemas.microsoft.com/office/drawing/2010/main">
+              <a14:hiddenEffects xmlns:a14="http://schemas.microsoft.com/office/drawing/2010/main" xmlns="">
                 <a:effectLst>
                   <a:outerShdw blurRad="63500" dist="38099" dir="2700000" algn="ctr" rotWithShape="0">
                     <a:schemeClr val="bg2">
@@ -18859,7 +18922,7 @@
           <a:effectLst/>
           <a:extLst>
             <a:ext uri="{AF507438-7753-43e0-B8FC-AC1667EBCBE1}">
-              <a14:hiddenEffects xmlns="" xmlns:a14="http://schemas.microsoft.com/office/drawing/2010/main">
+              <a14:hiddenEffects xmlns:a14="http://schemas.microsoft.com/office/drawing/2010/main" xmlns="">
                 <a:effectLst>
                   <a:outerShdw blurRad="63500" dist="38099" dir="2700000" algn="ctr" rotWithShape="0">
                     <a:schemeClr val="bg2">
@@ -19030,7 +19093,7 @@
           <a:effectLst/>
           <a:extLst>
             <a:ext uri="{AF507438-7753-43e0-B8FC-AC1667EBCBE1}">
-              <a14:hiddenEffects xmlns="" xmlns:a14="http://schemas.microsoft.com/office/drawing/2010/main">
+              <a14:hiddenEffects xmlns:a14="http://schemas.microsoft.com/office/drawing/2010/main" xmlns="">
                 <a:effectLst>
                   <a:outerShdw blurRad="63500" dist="38099" dir="2700000" algn="ctr" rotWithShape="0">
                     <a:schemeClr val="bg2">
@@ -19577,13 +19640,13 @@
   <p:clrMapOvr>
     <a:masterClrMapping/>
   </p:clrMapOvr>
-  <mc:AlternateContent xmlns:mc="http://schemas.openxmlformats.org/markup-compatibility/2006">
-    <mc:Choice xmlns:p159="http://schemas.microsoft.com/office/powerpoint/2015/09/main" Requires="p159">
+  <mc:AlternateContent xmlns:mc="http://schemas.openxmlformats.org/markup-compatibility/2006" xmlns:p159="http://schemas.microsoft.com/office/powerpoint/2015/09/main">
+    <mc:Choice Requires="p159">
       <p:transition xmlns:p14="http://schemas.microsoft.com/office/powerpoint/2010/main" spd="slow" p14:dur="2000">
         <p159:morph option="byObject"/>
       </p:transition>
     </mc:Choice>
-    <mc:Fallback>
+    <mc:Fallback xmlns="">
       <p:transition spd="slow">
         <p:fade/>
       </p:transition>
@@ -19887,13 +19950,13 @@
   <p:clrMapOvr>
     <a:masterClrMapping/>
   </p:clrMapOvr>
-  <mc:AlternateContent xmlns:mc="http://schemas.openxmlformats.org/markup-compatibility/2006">
-    <mc:Choice xmlns:p159="http://schemas.microsoft.com/office/powerpoint/2015/09/main" Requires="p159">
+  <mc:AlternateContent xmlns:mc="http://schemas.openxmlformats.org/markup-compatibility/2006" xmlns:p159="http://schemas.microsoft.com/office/powerpoint/2015/09/main">
+    <mc:Choice Requires="p159">
       <p:transition xmlns:p14="http://schemas.microsoft.com/office/powerpoint/2010/main" spd="slow" p14:dur="2000">
         <p159:morph option="byObject"/>
       </p:transition>
     </mc:Choice>
-    <mc:Fallback>
+    <mc:Fallback xmlns="">
       <p:transition spd="slow">
         <p:fade/>
       </p:transition>
@@ -20507,7 +20570,7 @@
           </a:ln>
           <a:extLst>
             <a:ext uri="{AF507438-7753-43e0-B8FC-AC1667EBCBE1}">
-              <a14:hiddenEffects xmlns="" xmlns:a14="http://schemas.microsoft.com/office/drawing/2010/main">
+              <a14:hiddenEffects xmlns:a14="http://schemas.microsoft.com/office/drawing/2010/main" xmlns="">
                 <a:effectLst>
                   <a:outerShdw blurRad="63500" dist="38099" dir="2700000" algn="ctr" rotWithShape="0">
                     <a:schemeClr val="bg2">
@@ -20948,13 +21011,13 @@
   <p:clrMapOvr>
     <a:masterClrMapping/>
   </p:clrMapOvr>
-  <mc:AlternateContent xmlns:mc="http://schemas.openxmlformats.org/markup-compatibility/2006">
-    <mc:Choice xmlns:p159="http://schemas.microsoft.com/office/powerpoint/2015/09/main" Requires="p159">
+  <mc:AlternateContent xmlns:mc="http://schemas.openxmlformats.org/markup-compatibility/2006" xmlns:p159="http://schemas.microsoft.com/office/powerpoint/2015/09/main">
+    <mc:Choice Requires="p159">
       <p:transition xmlns:p14="http://schemas.microsoft.com/office/powerpoint/2010/main" spd="slow" p14:dur="2000">
         <p159:morph option="byObject"/>
       </p:transition>
     </mc:Choice>
-    <mc:Fallback>
+    <mc:Fallback xmlns="">
       <p:transition spd="slow">
         <p:fade/>
       </p:transition>
@@ -22581,7 +22644,7 @@
           <a:effectLst/>
           <a:extLst>
             <a:ext uri="{AF507438-7753-43e0-B8FC-AC1667EBCBE1}">
-              <a14:hiddenEffects xmlns="" xmlns:a14="http://schemas.microsoft.com/office/drawing/2010/main">
+              <a14:hiddenEffects xmlns:a14="http://schemas.microsoft.com/office/drawing/2010/main" xmlns="">
                 <a:effectLst>
                   <a:outerShdw blurRad="63500" dist="38099" dir="2700000" algn="ctr" rotWithShape="0">
                     <a:schemeClr val="bg2">
@@ -22633,7 +22696,7 @@
           <a:effectLst/>
           <a:extLst>
             <a:ext uri="{AF507438-7753-43e0-B8FC-AC1667EBCBE1}">
-              <a14:hiddenEffects xmlns="" xmlns:a14="http://schemas.microsoft.com/office/drawing/2010/main">
+              <a14:hiddenEffects xmlns:a14="http://schemas.microsoft.com/office/drawing/2010/main" xmlns="">
                 <a:effectLst>
                   <a:outerShdw blurRad="63500" dist="38099" dir="2700000" algn="ctr" rotWithShape="0">
                     <a:schemeClr val="bg2">
@@ -22728,7 +22791,7 @@
           <a:effectLst/>
           <a:extLst>
             <a:ext uri="{AF507438-7753-43e0-B8FC-AC1667EBCBE1}">
-              <a14:hiddenEffects xmlns="" xmlns:a14="http://schemas.microsoft.com/office/drawing/2010/main">
+              <a14:hiddenEffects xmlns:a14="http://schemas.microsoft.com/office/drawing/2010/main" xmlns="">
                 <a:effectLst>
                   <a:outerShdw blurRad="63500" dist="38099" dir="2700000" algn="ctr" rotWithShape="0">
                     <a:schemeClr val="bg2">
@@ -22823,7 +22886,7 @@
           <a:effectLst/>
           <a:extLst>
             <a:ext uri="{AF507438-7753-43e0-B8FC-AC1667EBCBE1}">
-              <a14:hiddenEffects xmlns="" xmlns:a14="http://schemas.microsoft.com/office/drawing/2010/main">
+              <a14:hiddenEffects xmlns:a14="http://schemas.microsoft.com/office/drawing/2010/main" xmlns="">
                 <a:effectLst>
                   <a:outerShdw blurRad="63500" dist="38099" dir="2700000" algn="ctr" rotWithShape="0">
                     <a:schemeClr val="bg2">
@@ -23205,7 +23268,7 @@
           <a:effectLst/>
           <a:extLst>
             <a:ext uri="{AF507438-7753-43e0-B8FC-AC1667EBCBE1}">
-              <a14:hiddenEffects xmlns="" xmlns:a14="http://schemas.microsoft.com/office/drawing/2010/main">
+              <a14:hiddenEffects xmlns:a14="http://schemas.microsoft.com/office/drawing/2010/main" xmlns="">
                 <a:effectLst>
                   <a:outerShdw blurRad="63500" dist="38099" dir="2700000" algn="ctr" rotWithShape="0">
                     <a:schemeClr val="bg2">
@@ -23257,7 +23320,7 @@
           <a:effectLst/>
           <a:extLst>
             <a:ext uri="{AF507438-7753-43e0-B8FC-AC1667EBCBE1}">
-              <a14:hiddenEffects xmlns="" xmlns:a14="http://schemas.microsoft.com/office/drawing/2010/main">
+              <a14:hiddenEffects xmlns:a14="http://schemas.microsoft.com/office/drawing/2010/main" xmlns="">
                 <a:effectLst>
                   <a:outerShdw blurRad="63500" dist="38099" dir="2700000" algn="ctr" rotWithShape="0">
                     <a:schemeClr val="bg2">
@@ -23352,7 +23415,7 @@
           <a:effectLst/>
           <a:extLst>
             <a:ext uri="{AF507438-7753-43e0-B8FC-AC1667EBCBE1}">
-              <a14:hiddenEffects xmlns="" xmlns:a14="http://schemas.microsoft.com/office/drawing/2010/main">
+              <a14:hiddenEffects xmlns:a14="http://schemas.microsoft.com/office/drawing/2010/main" xmlns="">
                 <a:effectLst>
                   <a:outerShdw blurRad="63500" dist="38099" dir="2700000" algn="ctr" rotWithShape="0">
                     <a:schemeClr val="bg2">
@@ -23447,7 +23510,7 @@
           <a:effectLst/>
           <a:extLst>
             <a:ext uri="{AF507438-7753-43e0-B8FC-AC1667EBCBE1}">
-              <a14:hiddenEffects xmlns="" xmlns:a14="http://schemas.microsoft.com/office/drawing/2010/main">
+              <a14:hiddenEffects xmlns:a14="http://schemas.microsoft.com/office/drawing/2010/main" xmlns="">
                 <a:effectLst>
                   <a:outerShdw blurRad="63500" dist="38099" dir="2700000" algn="ctr" rotWithShape="0">
                     <a:schemeClr val="bg2">
@@ -23968,13 +24031,13 @@
   <p:clrMapOvr>
     <a:masterClrMapping/>
   </p:clrMapOvr>
-  <mc:AlternateContent xmlns:mc="http://schemas.openxmlformats.org/markup-compatibility/2006">
-    <mc:Choice xmlns:p159="http://schemas.microsoft.com/office/powerpoint/2015/09/main" Requires="p159">
+  <mc:AlternateContent xmlns:mc="http://schemas.openxmlformats.org/markup-compatibility/2006" xmlns:p159="http://schemas.microsoft.com/office/powerpoint/2015/09/main">
+    <mc:Choice Requires="p159">
       <p:transition xmlns:p14="http://schemas.microsoft.com/office/powerpoint/2010/main" spd="slow" p14:dur="2000">
         <p159:morph option="byObject"/>
       </p:transition>
     </mc:Choice>
-    <mc:Fallback>
+    <mc:Fallback xmlns="">
       <p:transition spd="slow">
         <p:fade/>
       </p:transition>
@@ -24293,7 +24356,7 @@
           <a:effectLst/>
           <a:extLst>
             <a:ext uri="{AF507438-7753-43e0-B8FC-AC1667EBCBE1}">
-              <a14:hiddenEffects xmlns="" xmlns:a14="http://schemas.microsoft.com/office/drawing/2010/main">
+              <a14:hiddenEffects xmlns:a14="http://schemas.microsoft.com/office/drawing/2010/main" xmlns="">
                 <a:effectLst>
                   <a:outerShdw blurRad="63500" dist="38099" dir="2700000" algn="ctr" rotWithShape="0">
                     <a:schemeClr val="bg2">
@@ -24614,7 +24677,7 @@
         <a:effectLst/>
         <a:extLst>
           <a:ext uri="{AF507438-7753-43e0-B8FC-AC1667EBCBE1}">
-            <a14:hiddenEffects xmlns:a14="http://schemas.microsoft.com/office/drawing/2010/main" xmlns="">
+            <a14:hiddenEffects xmlns="" xmlns:a14="http://schemas.microsoft.com/office/drawing/2010/main">
               <a:effectLst>
                 <a:outerShdw blurRad="63500" dist="38099" dir="2700000" algn="ctr" rotWithShape="0">
                   <a:schemeClr val="bg2">
@@ -24690,7 +24753,7 @@
         <a:effectLst/>
         <a:extLst>
           <a:ext uri="{AF507438-7753-43e0-B8FC-AC1667EBCBE1}">
-            <a14:hiddenEffects xmlns:a14="http://schemas.microsoft.com/office/drawing/2010/main" xmlns="">
+            <a14:hiddenEffects xmlns="" xmlns:a14="http://schemas.microsoft.com/office/drawing/2010/main">
               <a:effectLst>
                 <a:outerShdw blurRad="63500" dist="38099" dir="2700000" algn="ctr" rotWithShape="0">
                   <a:schemeClr val="bg2">
@@ -25440,15 +25503,6 @@
 </file>
 
 <file path=customXml/item1.xml><?xml version="1.0" encoding="utf-8"?>
-<?mso-contentType ?>
-<FormTemplates xmlns="http://schemas.microsoft.com/sharepoint/v3/contenttype/forms">
-  <Display>DocumentLibraryForm</Display>
-  <Edit>DocumentLibraryForm</Edit>
-  <New>DocumentLibraryForm</New>
-</FormTemplates>
-</file>
-
-<file path=customXml/item2.xml><?xml version="1.0" encoding="utf-8"?>
 <ct:contentTypeSchema xmlns:ct="http://schemas.microsoft.com/office/2006/metadata/contentType" xmlns:ma="http://schemas.microsoft.com/office/2006/metadata/properties/metaAttributes" ct:_="" ma:_="" ma:contentTypeName="Dokument" ma:contentTypeID="0x0101003BB9829B882D5140ABCB1E6D3420C654" ma:contentTypeVersion="3" ma:contentTypeDescription="Ein neues Dokument erstellen." ma:contentTypeScope="" ma:versionID="1ff9e6813f6a021bde9a3ac2c4138494">
   <xsd:schema xmlns:xsd="http://www.w3.org/2001/XMLSchema" xmlns:xs="http://www.w3.org/2001/XMLSchema" xmlns:p="http://schemas.microsoft.com/office/2006/metadata/properties" xmlns:ns2="3a707376-506f-4a54-80e5-a7ee0ccf0c22" targetNamespace="http://schemas.microsoft.com/office/2006/metadata/properties" ma:root="true" ma:fieldsID="883b05fc9c717fcbf1c87f95fccc8ba6" ns2:_="">
     <xsd:import namespace="3a707376-506f-4a54-80e5-a7ee0ccf0c22"/>
@@ -25604,7 +25658,20 @@
 </ct:contentTypeSchema>
 </file>
 
+<file path=customXml/item2.xml><?xml version="1.0" encoding="utf-8"?>
+<?mso-contentType ?>
+<FormTemplates xmlns="http://schemas.microsoft.com/sharepoint/v3/contenttype/forms">
+  <Display>DocumentLibraryForm</Display>
+  <Edit>DocumentLibraryForm</Edit>
+  <New>DocumentLibraryForm</New>
+</FormTemplates>
+</file>
+
 <file path=customXml/item3.xml><?xml version="1.0" encoding="utf-8"?>
+<LongProperties xmlns="http://schemas.microsoft.com/office/2006/metadata/longProperties"/>
+</file>
+
+<file path=customXml/item4.xml><?xml version="1.0" encoding="utf-8"?>
 <p:properties xmlns:p="http://schemas.microsoft.com/office/2006/metadata/properties" xmlns:xsi="http://www.w3.org/2001/XMLSchema-instance" xmlns:pc="http://schemas.microsoft.com/office/infopath/2007/PartnerControls">
   <documentManagement>
     <Sprache xmlns="3a707376-506f-4a54-80e5-a7ee0ccf0c22">1</Sprache>
@@ -25620,19 +25687,7 @@
 </p:properties>
 </file>
 
-<file path=customXml/item4.xml><?xml version="1.0" encoding="utf-8"?>
-<LongProperties xmlns="http://schemas.microsoft.com/office/2006/metadata/longProperties"/>
-</file>
-
 <file path=customXml/itemProps1.xml><?xml version="1.0" encoding="utf-8"?>
-<ds:datastoreItem xmlns:ds="http://schemas.openxmlformats.org/officeDocument/2006/customXml" ds:itemID="{EE7FB4F2-1982-4D8F-808C-8CBCA3F07F59}">
-  <ds:schemaRefs>
-    <ds:schemaRef ds:uri="http://schemas.microsoft.com/sharepoint/v3/contenttype/forms"/>
-  </ds:schemaRefs>
-</ds:datastoreItem>
-</file>
-
-<file path=customXml/itemProps2.xml><?xml version="1.0" encoding="utf-8"?>
 <ds:datastoreItem xmlns:ds="http://schemas.openxmlformats.org/officeDocument/2006/customXml" ds:itemID="{6ED764D9-4867-4B61-A090-A28E5B8CCE6A}">
   <ds:schemaRefs>
     <ds:schemaRef ds:uri="http://schemas.microsoft.com/office/2006/metadata/contentType"/>
@@ -25650,7 +25705,23 @@
 </ds:datastoreItem>
 </file>
 
+<file path=customXml/itemProps2.xml><?xml version="1.0" encoding="utf-8"?>
+<ds:datastoreItem xmlns:ds="http://schemas.openxmlformats.org/officeDocument/2006/customXml" ds:itemID="{EE7FB4F2-1982-4D8F-808C-8CBCA3F07F59}">
+  <ds:schemaRefs>
+    <ds:schemaRef ds:uri="http://schemas.microsoft.com/sharepoint/v3/contenttype/forms"/>
+  </ds:schemaRefs>
+</ds:datastoreItem>
+</file>
+
 <file path=customXml/itemProps3.xml><?xml version="1.0" encoding="utf-8"?>
+<ds:datastoreItem xmlns:ds="http://schemas.openxmlformats.org/officeDocument/2006/customXml" ds:itemID="{127EC1BB-5971-4167-BF15-3110E1B5EC85}">
+  <ds:schemaRefs>
+    <ds:schemaRef ds:uri="http://schemas.microsoft.com/office/2006/metadata/longProperties"/>
+  </ds:schemaRefs>
+</ds:datastoreItem>
+</file>
+
+<file path=customXml/itemProps4.xml><?xml version="1.0" encoding="utf-8"?>
 <ds:datastoreItem xmlns:ds="http://schemas.openxmlformats.org/officeDocument/2006/customXml" ds:itemID="{EEE43284-5452-4815-8772-BEA061DA53D9}">
   <ds:schemaRefs>
     <ds:schemaRef ds:uri="http://schemas.openxmlformats.org/package/2006/metadata/core-properties"/>
@@ -25665,12 +25736,4 @@
     <ds:schemaRef ds:uri="3a707376-506f-4a54-80e5-a7ee0ccf0c22"/>
   </ds:schemaRefs>
 </ds:datastoreItem>
-</file>
-
-<file path=customXml/itemProps4.xml><?xml version="1.0" encoding="utf-8"?>
-<ds:datastoreItem xmlns:ds="http://schemas.openxmlformats.org/officeDocument/2006/customXml" ds:itemID="{127EC1BB-5971-4167-BF15-3110E1B5EC85}">
-  <ds:schemaRefs>
-    <ds:schemaRef ds:uri="http://schemas.microsoft.com/office/2006/metadata/longProperties"/>
-  </ds:schemaRefs>
-</ds:datastoreItem>
 </file>